--- a/agentic_rl_parallel_config.pptx
+++ b/agentic_rl_parallel_config.pptx
@@ -12,6 +12,10 @@
     <p:sldId id="260" r:id="rId11"/>
     <p:sldId id="261" r:id="rId12"/>
     <p:sldId id="262" r:id="rId13"/>
+    <p:sldId id="263" r:id="rId14"/>
+    <p:sldId id="264" r:id="rId15"/>
+    <p:sldId id="265" r:id="rId16"/>
+    <p:sldId id="266" r:id="rId17"/>
   </p:sldIdLst>
   <p:sldSz cx="12191695" cy="6858000" type="screen4x3"/>
   <p:notesSz cx="6858000" cy="9144000"/>
@@ -3349,6 +3353,1263 @@
 </p:sld>
 </file>
 
+<file path=ppt/slides/slide10.xml><?xml version="1.0" encoding="utf-8"?>
+<p:sld xmlns:a="http://schemas.openxmlformats.org/drawingml/2006/main" xmlns:p="http://schemas.openxmlformats.org/presentationml/2006/main" xmlns:r="http://schemas.openxmlformats.org/officeDocument/2006/relationships">
+  <p:cSld>
+    <p:spTree>
+      <p:nvGrpSpPr>
+        <p:cNvPr id="1" name=""/>
+        <p:cNvGrpSpPr/>
+        <p:nvPr/>
+      </p:nvGrpSpPr>
+      <p:grpSpPr/>
+      <p:sp>
+        <p:nvSpPr>
+          <p:cNvPr id="2" name="Rectangle 1"/>
+          <p:cNvSpPr/>
+          <p:nvPr/>
+        </p:nvSpPr>
+        <p:spPr>
+          <a:xfrm>
+            <a:off x="0" y="0"/>
+            <a:ext cx="12191695" cy="914400"/>
+          </a:xfrm>
+          <a:prstGeom prst="rect">
+            <a:avLst/>
+          </a:prstGeom>
+          <a:solidFill>
+            <a:srgbClr val="222B38"/>
+          </a:solidFill>
+          <a:ln>
+            <a:noFill/>
+          </a:ln>
+          <a:effectLst/>
+        </p:spPr>
+        <p:style>
+          <a:lnRef idx="1">
+            <a:schemeClr val="accent1"/>
+          </a:lnRef>
+          <a:fillRef idx="3">
+            <a:schemeClr val="accent1"/>
+          </a:fillRef>
+          <a:effectRef idx="2">
+            <a:schemeClr val="accent1"/>
+          </a:effectRef>
+          <a:fontRef idx="minor">
+            <a:schemeClr val="lt1"/>
+          </a:fontRef>
+        </p:style>
+        <p:txBody>
+          <a:bodyPr rtlCol="0" anchor="ctr" lIns="457200" tIns="155448"/>
+          <a:lstStyle/>
+          <a:p>
+            <a:pPr algn="ctr"/>
+            <a:r>
+              <a:rPr sz="2100" b="1" lang="zh-CN">
+                <a:solidFill>
+                  <a:srgbClr val="FFFFFF"/>
+                </a:solidFill>
+                <a:latin typeface="PingFang SC"/>
+                <a:ea typeface="PingFang SC"/>
+                <a:cs typeface="PingFang SC"/>
+              </a:rPr>
+              <a:t>5 · 选型建议与结构性结论</a:t>
+            </a:r>
+          </a:p>
+        </p:txBody>
+      </p:sp>
+      <p:sp>
+        <p:nvSpPr>
+          <p:cNvPr id="3" name="Rectangle 2"/>
+          <p:cNvSpPr/>
+          <p:nvPr/>
+        </p:nvSpPr>
+        <p:spPr>
+          <a:xfrm>
+            <a:off x="0" y="914400"/>
+            <a:ext cx="201168" cy="82296"/>
+          </a:xfrm>
+          <a:prstGeom prst="rect">
+            <a:avLst/>
+          </a:prstGeom>
+          <a:solidFill>
+            <a:srgbClr val="C7000B"/>
+          </a:solidFill>
+          <a:ln>
+            <a:noFill/>
+          </a:ln>
+          <a:effectLst/>
+        </p:spPr>
+        <p:style>
+          <a:lnRef idx="1">
+            <a:schemeClr val="accent1"/>
+          </a:lnRef>
+          <a:fillRef idx="3">
+            <a:schemeClr val="accent1"/>
+          </a:fillRef>
+          <a:effectRef idx="2">
+            <a:schemeClr val="accent1"/>
+          </a:effectRef>
+          <a:fontRef idx="minor">
+            <a:schemeClr val="lt1"/>
+          </a:fontRef>
+        </p:style>
+        <p:txBody>
+          <a:bodyPr rtlCol="0" anchor="ctr"/>
+          <a:lstStyle/>
+          <a:p>
+            <a:pPr algn="ctr"/>
+          </a:p>
+        </p:txBody>
+      </p:sp>
+      <p:sp>
+        <p:nvSpPr>
+          <p:cNvPr id="4" name="TextBox 3"/>
+          <p:cNvSpPr txBox="1"/>
+          <p:nvPr/>
+        </p:nvSpPr>
+        <p:spPr>
+          <a:xfrm>
+            <a:off x="457200" y="6446520"/>
+            <a:ext cx="10058400" cy="274320"/>
+          </a:xfrm>
+          <a:prstGeom prst="rect">
+            <a:avLst/>
+          </a:prstGeom>
+          <a:noFill/>
+        </p:spPr>
+        <p:txBody>
+          <a:bodyPr wrap="square">
+            <a:spAutoFit/>
+          </a:bodyPr>
+          <a:lstStyle/>
+          <a:p>
+            <a:r>
+              <a:rPr sz="900" b="0" lang="zh-CN">
+                <a:solidFill>
+                  <a:srgbClr val="6B7480"/>
+                </a:solidFill>
+                <a:latin typeface="PingFang SC"/>
+                <a:ea typeface="PingFang SC"/>
+                <a:cs typeface="PingFang SC"/>
+              </a:rPr>
+              <a:t>Qwen3-235B-A22B Agentic RL · 长序列并行配置寻优（128k / 1M · 256 die · ZeRO-2）</a:t>
+            </a:r>
+          </a:p>
+        </p:txBody>
+      </p:sp>
+      <p:sp>
+        <p:nvSpPr>
+          <p:cNvPr id="5" name="TextBox 4"/>
+          <p:cNvSpPr txBox="1"/>
+          <p:nvPr/>
+        </p:nvSpPr>
+        <p:spPr>
+          <a:xfrm>
+            <a:off x="11338560" y="6446520"/>
+            <a:ext cx="731520" cy="274320"/>
+          </a:xfrm>
+          <a:prstGeom prst="rect">
+            <a:avLst/>
+          </a:prstGeom>
+          <a:noFill/>
+        </p:spPr>
+        <p:txBody>
+          <a:bodyPr wrap="square">
+            <a:spAutoFit/>
+          </a:bodyPr>
+          <a:lstStyle/>
+          <a:p>
+            <a:pPr algn="r"/>
+            <a:r>
+              <a:rPr sz="1000" b="1" lang="zh-CN">
+                <a:solidFill>
+                  <a:srgbClr val="6B7480"/>
+                </a:solidFill>
+                <a:latin typeface="PingFang SC"/>
+                <a:ea typeface="PingFang SC"/>
+                <a:cs typeface="PingFang SC"/>
+              </a:rPr>
+              <a:t>10</a:t>
+            </a:r>
+          </a:p>
+        </p:txBody>
+      </p:sp>
+      <p:graphicFrame>
+        <p:nvGraphicFramePr>
+          <p:cNvPr id="6" name="Table 5"/>
+          <p:cNvGraphicFramePr>
+            <a:graphicFrameLocks noGrp="1"/>
+          </p:cNvGraphicFramePr>
+          <p:nvPr/>
+        </p:nvGraphicFramePr>
+        <p:xfrm>
+          <a:off x="502920" y="1371600"/>
+          <a:ext cx="11155680" cy="2852928"/>
+        </p:xfrm>
+        <a:graphic>
+          <a:graphicData uri="http://schemas.openxmlformats.org/drawingml/2006/table">
+            <a:tbl>
+              <a:tblPr>
+                <a:tableStyleId>{5C22544A-7EE6-4342-B048-85BDC9FD1C3A}</a:tableStyleId>
+              </a:tblPr>
+              <a:tblGrid>
+                <a:gridCol w="2045208"/>
+                <a:gridCol w="3997452"/>
+                <a:gridCol w="5113020"/>
+              </a:tblGrid>
+              <a:tr h="475488">
+                <a:tc>
+                  <a:txBody>
+                    <a:bodyPr/>
+                    <a:lstStyle/>
+                    <a:p>
+                      <a:pPr algn="ctr"/>
+                      <a:r>
+                        <a:rPr sz="1200" b="1" lang="zh-CN">
+                          <a:solidFill>
+                            <a:srgbClr val="FFFFFF"/>
+                          </a:solidFill>
+                          <a:latin typeface="PingFang SC"/>
+                          <a:ea typeface="PingFang SC"/>
+                          <a:cs typeface="PingFang SC"/>
+                        </a:rPr>
+                        <a:t>维度</a:t>
+                      </a:r>
+                    </a:p>
+                  </a:txBody>
+                  <a:tcPr anchor="ctr" marL="45720" marR="45720" marT="18288" marB="18288">
+                    <a:solidFill>
+                      <a:srgbClr val="222B38"/>
+                    </a:solidFill>
+                  </a:tcPr>
+                </a:tc>
+                <a:tc>
+                  <a:txBody>
+                    <a:bodyPr/>
+                    <a:lstStyle/>
+                    <a:p>
+                      <a:pPr algn="ctr"/>
+                      <a:r>
+                        <a:rPr sz="1200" b="1" lang="zh-CN">
+                          <a:solidFill>
+                            <a:srgbClr val="FFFFFF"/>
+                          </a:solidFill>
+                          <a:latin typeface="PingFang SC"/>
+                          <a:ea typeface="PingFang SC"/>
+                          <a:cs typeface="PingFang SC"/>
+                        </a:rPr>
+                        <a:t>128k</a:t>
+                      </a:r>
+                    </a:p>
+                  </a:txBody>
+                  <a:tcPr anchor="ctr" marL="45720" marR="45720" marT="18288" marB="18288">
+                    <a:solidFill>
+                      <a:srgbClr val="222B38"/>
+                    </a:solidFill>
+                  </a:tcPr>
+                </a:tc>
+                <a:tc>
+                  <a:txBody>
+                    <a:bodyPr/>
+                    <a:lstStyle/>
+                    <a:p>
+                      <a:pPr algn="ctr"/>
+                      <a:r>
+                        <a:rPr sz="1200" b="1" lang="zh-CN">
+                          <a:solidFill>
+                            <a:srgbClr val="FFFFFF"/>
+                          </a:solidFill>
+                          <a:latin typeface="PingFang SC"/>
+                          <a:ea typeface="PingFang SC"/>
+                          <a:cs typeface="PingFang SC"/>
+                        </a:rPr>
+                        <a:t>1M</a:t>
+                      </a:r>
+                    </a:p>
+                  </a:txBody>
+                  <a:tcPr anchor="ctr" marL="45720" marR="45720" marT="18288" marB="18288">
+                    <a:solidFill>
+                      <a:srgbClr val="222B38"/>
+                    </a:solidFill>
+                  </a:tcPr>
+                </a:tc>
+              </a:tr>
+              <a:tr h="475488">
+                <a:tc>
+                  <a:txBody>
+                    <a:bodyPr wrap="square"/>
+                    <a:lstStyle/>
+                    <a:p>
+                      <a:pPr algn="l"/>
+                      <a:r>
+                        <a:rPr sz="1200" b="1" lang="zh-CN">
+                          <a:solidFill>
+                            <a:srgbClr val="222B38"/>
+                          </a:solidFill>
+                          <a:latin typeface="PingFang SC"/>
+                          <a:ea typeface="PingFang SC"/>
+                          <a:cs typeface="PingFang SC"/>
+                        </a:rPr>
+                        <a:t>显存是否紧</a:t>
+                      </a:r>
+                    </a:p>
+                  </a:txBody>
+                  <a:tcPr anchor="ctr" marL="45720" marR="45720" marT="18288" marB="18288">
+                    <a:solidFill>
+                      <a:srgbClr val="FFFFFF"/>
+                    </a:solidFill>
+                  </a:tcPr>
+                </a:tc>
+                <a:tc>
+                  <a:txBody>
+                    <a:bodyPr wrap="square"/>
+                    <a:lstStyle/>
+                    <a:p>
+                      <a:pPr algn="l"/>
+                      <a:r>
+                        <a:rPr sz="1200" b="0" lang="zh-CN">
+                          <a:solidFill>
+                            <a:srgbClr val="222B38"/>
+                          </a:solidFill>
+                          <a:latin typeface="PingFang SC"/>
+                          <a:ea typeface="PingFang SC"/>
+                          <a:cs typeface="PingFang SC"/>
+                        </a:rPr>
+                        <a:t>松（峰值 33–59 / 64）</a:t>
+                      </a:r>
+                    </a:p>
+                  </a:txBody>
+                  <a:tcPr anchor="ctr" marL="45720" marR="45720" marT="18288" marB="18288">
+                    <a:solidFill>
+                      <a:srgbClr val="FFFFFF"/>
+                    </a:solidFill>
+                  </a:tcPr>
+                </a:tc>
+                <a:tc>
+                  <a:txBody>
+                    <a:bodyPr wrap="square"/>
+                    <a:lstStyle/>
+                    <a:p>
+                      <a:pPr algn="l"/>
+                      <a:r>
+                        <a:rPr sz="1200" b="0" lang="zh-CN">
+                          <a:solidFill>
+                            <a:srgbClr val="222B38"/>
+                          </a:solidFill>
+                          <a:latin typeface="PingFang SC"/>
+                          <a:ea typeface="PingFang SC"/>
+                          <a:cs typeface="PingFang SC"/>
+                        </a:rPr>
+                        <a:t>紧（56–59 / 64，须 TP×CP≥32）</a:t>
+                      </a:r>
+                    </a:p>
+                  </a:txBody>
+                  <a:tcPr anchor="ctr" marL="45720" marR="45720" marT="18288" marB="18288">
+                    <a:solidFill>
+                      <a:srgbClr val="FFFFFF"/>
+                    </a:solidFill>
+                  </a:tcPr>
+                </a:tc>
+              </a:tr>
+              <a:tr h="475488">
+                <a:tc>
+                  <a:txBody>
+                    <a:bodyPr wrap="square"/>
+                    <a:lstStyle/>
+                    <a:p>
+                      <a:pPr algn="l"/>
+                      <a:r>
+                        <a:rPr sz="1200" b="1" lang="zh-CN">
+                          <a:solidFill>
+                            <a:srgbClr val="222B38"/>
+                          </a:solidFill>
+                          <a:latin typeface="PingFang SC"/>
+                          <a:ea typeface="PingFang SC"/>
+                          <a:cs typeface="PingFang SC"/>
+                        </a:rPr>
+                        <a:t>主导旋钮</a:t>
+                      </a:r>
+                    </a:p>
+                  </a:txBody>
+                  <a:tcPr anchor="ctr" marL="45720" marR="45720" marT="18288" marB="18288">
+                    <a:solidFill>
+                      <a:srgbClr val="F3F5F8"/>
+                    </a:solidFill>
+                  </a:tcPr>
+                </a:tc>
+                <a:tc>
+                  <a:txBody>
+                    <a:bodyPr wrap="square"/>
+                    <a:lstStyle/>
+                    <a:p>
+                      <a:pPr algn="l"/>
+                      <a:r>
+                        <a:rPr sz="1200" b="0" lang="zh-CN">
+                          <a:solidFill>
+                            <a:srgbClr val="222B38"/>
+                          </a:solidFill>
+                          <a:latin typeface="PingFang SC"/>
+                          <a:ea typeface="PingFang SC"/>
+                          <a:cs typeface="PingFang SC"/>
+                        </a:rPr>
+                        <a:t>b（并发）</a:t>
+                      </a:r>
+                    </a:p>
+                  </a:txBody>
+                  <a:tcPr anchor="ctr" marL="45720" marR="45720" marT="18288" marB="18288">
+                    <a:solidFill>
+                      <a:srgbClr val="F3F5F8"/>
+                    </a:solidFill>
+                  </a:tcPr>
+                </a:tc>
+                <a:tc>
+                  <a:txBody>
+                    <a:bodyPr wrap="square"/>
+                    <a:lstStyle/>
+                    <a:p>
+                      <a:pPr algn="l"/>
+                      <a:r>
+                        <a:rPr sz="1200" b="0" lang="zh-CN">
+                          <a:solidFill>
+                            <a:srgbClr val="222B38"/>
+                          </a:solidFill>
+                          <a:latin typeface="PingFang SC"/>
+                          <a:ea typeface="PingFang SC"/>
+                          <a:cs typeface="PingFang SC"/>
+                        </a:rPr>
+                        <a:t>CP（序列缩放）</a:t>
+                      </a:r>
+                    </a:p>
+                  </a:txBody>
+                  <a:tcPr anchor="ctr" marL="45720" marR="45720" marT="18288" marB="18288">
+                    <a:solidFill>
+                      <a:srgbClr val="F3F5F8"/>
+                    </a:solidFill>
+                  </a:tcPr>
+                </a:tc>
+              </a:tr>
+              <a:tr h="475488">
+                <a:tc>
+                  <a:txBody>
+                    <a:bodyPr wrap="square"/>
+                    <a:lstStyle/>
+                    <a:p>
+                      <a:pPr algn="l"/>
+                      <a:r>
+                        <a:rPr sz="1200" b="1" lang="zh-CN">
+                          <a:solidFill>
+                            <a:srgbClr val="222B38"/>
+                          </a:solidFill>
+                          <a:latin typeface="PingFang SC"/>
+                          <a:ea typeface="PingFang SC"/>
+                          <a:cs typeface="PingFang SC"/>
+                        </a:rPr>
+                        <a:t>默认推荐</a:t>
+                      </a:r>
+                    </a:p>
+                  </a:txBody>
+                  <a:tcPr anchor="ctr" marL="45720" marR="45720" marT="18288" marB="18288">
+                    <a:solidFill>
+                      <a:srgbClr val="FFFFFF"/>
+                    </a:solidFill>
+                  </a:tcPr>
+                </a:tc>
+                <a:tc>
+                  <a:txBody>
+                    <a:bodyPr wrap="square"/>
+                    <a:lstStyle/>
+                    <a:p>
+                      <a:pPr algn="l"/>
+                      <a:r>
+                        <a:rPr sz="1200" b="0" lang="zh-CN">
+                          <a:solidFill>
+                            <a:srgbClr val="222B38"/>
+                          </a:solidFill>
+                          <a:latin typeface="PingFang SC"/>
+                          <a:ea typeface="PingFang SC"/>
+                          <a:cs typeface="PingFang SC"/>
+                        </a:rPr>
+                        <a:t>T1  TP8·CP1·DP32（吞吐）</a:t>
+                      </a:r>
+                    </a:p>
+                  </a:txBody>
+                  <a:tcPr anchor="ctr" marL="45720" marR="45720" marT="18288" marB="18288">
+                    <a:solidFill>
+                      <a:srgbClr val="FFFFFF"/>
+                    </a:solidFill>
+                  </a:tcPr>
+                </a:tc>
+                <a:tc>
+                  <a:txBody>
+                    <a:bodyPr wrap="square"/>
+                    <a:lstStyle/>
+                    <a:p>
+                      <a:pPr algn="l"/>
+                      <a:r>
+                        <a:rPr sz="1200" b="0" lang="zh-CN">
+                          <a:solidFill>
+                            <a:srgbClr val="222B38"/>
+                          </a:solidFill>
+                          <a:latin typeface="PingFang SC"/>
+                          <a:ea typeface="PingFang SC"/>
+                          <a:cs typeface="PingFang SC"/>
+                        </a:rPr>
+                        <a:t>T2  TP8·CP4·DP8（吞吐，CP 最小）</a:t>
+                      </a:r>
+                    </a:p>
+                  </a:txBody>
+                  <a:tcPr anchor="ctr" marL="45720" marR="45720" marT="18288" marB="18288">
+                    <a:solidFill>
+                      <a:srgbClr val="FFFFFF"/>
+                    </a:solidFill>
+                  </a:tcPr>
+                </a:tc>
+              </a:tr>
+              <a:tr h="475488">
+                <a:tc>
+                  <a:txBody>
+                    <a:bodyPr wrap="square"/>
+                    <a:lstStyle/>
+                    <a:p>
+                      <a:pPr algn="l"/>
+                      <a:r>
+                        <a:rPr sz="1200" b="1" lang="zh-CN">
+                          <a:solidFill>
+                            <a:srgbClr val="222B38"/>
+                          </a:solidFill>
+                          <a:latin typeface="PingFang SC"/>
+                          <a:ea typeface="PingFang SC"/>
+                          <a:cs typeface="PingFang SC"/>
+                        </a:rPr>
+                        <a:t>高并发选</a:t>
+                      </a:r>
+                    </a:p>
+                  </a:txBody>
+                  <a:tcPr anchor="ctr" marL="45720" marR="45720" marT="18288" marB="18288">
+                    <a:solidFill>
+                      <a:srgbClr val="F3F5F8"/>
+                    </a:solidFill>
+                  </a:tcPr>
+                </a:tc>
+                <a:tc>
+                  <a:txBody>
+                    <a:bodyPr wrap="square"/>
+                    <a:lstStyle/>
+                    <a:p>
+                      <a:pPr algn="l"/>
+                      <a:r>
+                        <a:rPr sz="1200" b="0" lang="zh-CN">
+                          <a:solidFill>
+                            <a:srgbClr val="222B38"/>
+                          </a:solidFill>
+                          <a:latin typeface="PingFang SC"/>
+                          <a:ea typeface="PingFang SC"/>
+                          <a:cs typeface="PingFang SC"/>
+                        </a:rPr>
+                        <a:t>B1  TP8·CP2·DP16, b=32</a:t>
+                      </a:r>
+                    </a:p>
+                  </a:txBody>
+                  <a:tcPr anchor="ctr" marL="45720" marR="45720" marT="18288" marB="18288">
+                    <a:solidFill>
+                      <a:srgbClr val="F3F5F8"/>
+                    </a:solidFill>
+                  </a:tcPr>
+                </a:tc>
+                <a:tc>
+                  <a:txBody>
+                    <a:bodyPr wrap="square"/>
+                    <a:lstStyle/>
+                    <a:p>
+                      <a:pPr algn="l"/>
+                      <a:r>
+                        <a:rPr sz="1200" b="0" lang="zh-CN">
+                          <a:solidFill>
+                            <a:srgbClr val="222B38"/>
+                          </a:solidFill>
+                          <a:latin typeface="PingFang SC"/>
+                          <a:ea typeface="PingFang SC"/>
+                          <a:cs typeface="PingFang SC"/>
+                        </a:rPr>
+                        <a:t>C2  TP4·CP16·DP4, b=16</a:t>
+                      </a:r>
+                    </a:p>
+                  </a:txBody>
+                  <a:tcPr anchor="ctr" marL="45720" marR="45720" marT="18288" marB="18288">
+                    <a:solidFill>
+                      <a:srgbClr val="F3F5F8"/>
+                    </a:solidFill>
+                  </a:tcPr>
+                </a:tc>
+              </a:tr>
+              <a:tr h="475488">
+                <a:tc>
+                  <a:txBody>
+                    <a:bodyPr wrap="square"/>
+                    <a:lstStyle/>
+                    <a:p>
+                      <a:pPr algn="l"/>
+                      <a:r>
+                        <a:rPr sz="1200" b="1" lang="zh-CN">
+                          <a:solidFill>
+                            <a:srgbClr val="222B38"/>
+                          </a:solidFill>
+                          <a:latin typeface="PingFang SC"/>
+                          <a:ea typeface="PingFang SC"/>
+                          <a:cs typeface="PingFang SC"/>
+                        </a:rPr>
+                        <a:t>贴合「小 TP」</a:t>
+                      </a:r>
+                    </a:p>
+                  </a:txBody>
+                  <a:tcPr anchor="ctr" marL="45720" marR="45720" marT="18288" marB="18288">
+                    <a:solidFill>
+                      <a:srgbClr val="FFFFFF"/>
+                    </a:solidFill>
+                  </a:tcPr>
+                </a:tc>
+                <a:tc>
+                  <a:txBody>
+                    <a:bodyPr wrap="square"/>
+                    <a:lstStyle/>
+                    <a:p>
+                      <a:pPr algn="l"/>
+                      <a:r>
+                        <a:rPr sz="1200" b="0" lang="zh-CN">
+                          <a:solidFill>
+                            <a:srgbClr val="222B38"/>
+                          </a:solidFill>
+                          <a:latin typeface="PingFang SC"/>
+                          <a:ea typeface="PingFang SC"/>
+                          <a:cs typeface="PingFang SC"/>
+                        </a:rPr>
+                        <a:t>—</a:t>
+                      </a:r>
+                    </a:p>
+                  </a:txBody>
+                  <a:tcPr anchor="ctr" marL="45720" marR="45720" marT="18288" marB="18288">
+                    <a:solidFill>
+                      <a:srgbClr val="FFFFFF"/>
+                    </a:solidFill>
+                  </a:tcPr>
+                </a:tc>
+                <a:tc>
+                  <a:txBody>
+                    <a:bodyPr wrap="square"/>
+                    <a:lstStyle/>
+                    <a:p>
+                      <a:pPr algn="l"/>
+                      <a:r>
+                        <a:rPr sz="1200" b="0" lang="zh-CN">
+                          <a:solidFill>
+                            <a:srgbClr val="222B38"/>
+                          </a:solidFill>
+                          <a:latin typeface="PingFang SC"/>
+                          <a:ea typeface="PingFang SC"/>
+                          <a:cs typeface="PingFang SC"/>
+                        </a:rPr>
+                        <a:t>B2  TP4·CP8·DP8</a:t>
+                      </a:r>
+                    </a:p>
+                  </a:txBody>
+                  <a:tcPr anchor="ctr" marL="45720" marR="45720" marT="18288" marB="18288">
+                    <a:solidFill>
+                      <a:srgbClr val="FFFFFF"/>
+                    </a:solidFill>
+                  </a:tcPr>
+                </a:tc>
+              </a:tr>
+            </a:tbl>
+          </a:graphicData>
+        </a:graphic>
+      </p:graphicFrame>
+      <p:sp>
+        <p:nvSpPr>
+          <p:cNvPr id="7" name="TextBox 6"/>
+          <p:cNvSpPr txBox="1"/>
+          <p:nvPr/>
+        </p:nvSpPr>
+        <p:spPr>
+          <a:xfrm>
+            <a:off x="502920" y="4114800"/>
+            <a:ext cx="11155680" cy="2194560"/>
+          </a:xfrm>
+          <a:prstGeom prst="rect">
+            <a:avLst/>
+          </a:prstGeom>
+          <a:noFill/>
+        </p:spPr>
+        <p:txBody>
+          <a:bodyPr wrap="square">
+            <a:spAutoFit/>
+          </a:bodyPr>
+          <a:lstStyle/>
+          <a:p>
+            <a:pPr algn="l">
+              <a:spcAft>
+                <a:spcPts val="400"/>
+              </a:spcAft>
+            </a:pPr>
+            <a:r>
+              <a:rPr sz="1300" b="1" lang="zh-CN">
+                <a:solidFill>
+                  <a:srgbClr val="C7000B"/>
+                </a:solidFill>
+                <a:latin typeface="PingFang SC"/>
+                <a:ea typeface="PingFang SC"/>
+                <a:cs typeface="PingFang SC"/>
+              </a:rPr>
+              <a:t>三个结构性结论</a:t>
+            </a:r>
+          </a:p>
+          <a:p>
+            <a:pPr algn="l">
+              <a:spcAft>
+                <a:spcPts val="400"/>
+              </a:spcAft>
+            </a:pPr>
+            <a:r>
+              <a:rPr sz="1250" b="1" lang="zh-CN">
+                <a:solidFill>
+                  <a:srgbClr val="C02828"/>
+                </a:solidFill>
+                <a:latin typeface="PingFang SC"/>
+                <a:ea typeface="PingFang SC"/>
+                <a:cs typeface="PingFang SC"/>
+              </a:rPr>
+              <a:t>① CP 是 1M 的命门且抬带宽：序列 all-to-all ∝ S·h，CP=4–16 跨节点量巨大 → 必须超节点 fabric（A3/950DT），A2 彻底不可行</a:t>
+            </a:r>
+          </a:p>
+          <a:p>
+            <a:pPr algn="l">
+              <a:spcAft>
+                <a:spcPts val="400"/>
+              </a:spcAft>
+            </a:pPr>
+            <a:r>
+              <a:rPr sz="1250" b="0" lang="zh-CN">
+                <a:solidFill>
+                  <a:srgbClr val="222B38"/>
+                </a:solidFill>
+                <a:latin typeface="PingFang SC"/>
+                <a:ea typeface="PingFang SC"/>
+                <a:cs typeface="PingFang SC"/>
+              </a:rPr>
+              <a:t>② TP 上限=岛大小(8)，缩放交给 CP：TP&gt;8 跨岛得不偿失；用满 TP=8 再加 CP 是通信最省路径（T2）</a:t>
+            </a:r>
+          </a:p>
+          <a:p>
+            <a:pPr algn="l">
+              <a:spcAft>
+                <a:spcPts val="400"/>
+              </a:spcAft>
+            </a:pPr>
+            <a:r>
+              <a:rPr sz="1250" b="1" lang="zh-CN">
+                <a:solidFill>
+                  <a:srgbClr val="1B7F3B"/>
+                </a:solidFill>
+                <a:latin typeface="PingFang SC"/>
+                <a:ea typeface="PingFang SC"/>
+                <a:cs typeface="PingFang SC"/>
+              </a:rPr>
+              <a:t>③ decode 被 CP 兜住：KV/die 被 TP×CP 切到 ~25–50GB → 每步 KV 读 15–32ms；FP8 KV 再减半，是 1M rollout 关键杠杆</a:t>
+            </a:r>
+          </a:p>
+        </p:txBody>
+      </p:sp>
+    </p:spTree>
+  </p:cSld>
+  <p:clrMapOvr>
+    <a:masterClrMapping/>
+  </p:clrMapOvr>
+</p:sld>
+</file>
+
+<file path=ppt/slides/slide11.xml><?xml version="1.0" encoding="utf-8"?>
+<p:sld xmlns:a="http://schemas.openxmlformats.org/drawingml/2006/main" xmlns:p="http://schemas.openxmlformats.org/presentationml/2006/main" xmlns:r="http://schemas.openxmlformats.org/officeDocument/2006/relationships">
+  <p:cSld>
+    <p:spTree>
+      <p:nvGrpSpPr>
+        <p:cNvPr id="1" name=""/>
+        <p:cNvGrpSpPr/>
+        <p:nvPr/>
+      </p:nvGrpSpPr>
+      <p:grpSpPr/>
+      <p:sp>
+        <p:nvSpPr>
+          <p:cNvPr id="2" name="Rectangle 1"/>
+          <p:cNvSpPr/>
+          <p:nvPr/>
+        </p:nvSpPr>
+        <p:spPr>
+          <a:xfrm>
+            <a:off x="0" y="0"/>
+            <a:ext cx="12191695" cy="914400"/>
+          </a:xfrm>
+          <a:prstGeom prst="rect">
+            <a:avLst/>
+          </a:prstGeom>
+          <a:solidFill>
+            <a:srgbClr val="222B38"/>
+          </a:solidFill>
+          <a:ln>
+            <a:noFill/>
+          </a:ln>
+          <a:effectLst/>
+        </p:spPr>
+        <p:style>
+          <a:lnRef idx="1">
+            <a:schemeClr val="accent1"/>
+          </a:lnRef>
+          <a:fillRef idx="3">
+            <a:schemeClr val="accent1"/>
+          </a:fillRef>
+          <a:effectRef idx="2">
+            <a:schemeClr val="accent1"/>
+          </a:effectRef>
+          <a:fontRef idx="minor">
+            <a:schemeClr val="lt1"/>
+          </a:fontRef>
+        </p:style>
+        <p:txBody>
+          <a:bodyPr rtlCol="0" anchor="ctr" lIns="457200" tIns="155448"/>
+          <a:lstStyle/>
+          <a:p>
+            <a:pPr algn="ctr"/>
+            <a:r>
+              <a:rPr sz="2100" b="1" lang="zh-CN">
+                <a:solidFill>
+                  <a:srgbClr val="FFFFFF"/>
+                </a:solidFill>
+                <a:latin typeface="PingFang SC"/>
+                <a:ea typeface="PingFang SC"/>
+                <a:cs typeface="PingFang SC"/>
+              </a:rPr>
+              <a:t>附录 · 符号与公式</a:t>
+            </a:r>
+          </a:p>
+        </p:txBody>
+      </p:sp>
+      <p:sp>
+        <p:nvSpPr>
+          <p:cNvPr id="3" name="Rectangle 2"/>
+          <p:cNvSpPr/>
+          <p:nvPr/>
+        </p:nvSpPr>
+        <p:spPr>
+          <a:xfrm>
+            <a:off x="0" y="914400"/>
+            <a:ext cx="201168" cy="82296"/>
+          </a:xfrm>
+          <a:prstGeom prst="rect">
+            <a:avLst/>
+          </a:prstGeom>
+          <a:solidFill>
+            <a:srgbClr val="C7000B"/>
+          </a:solidFill>
+          <a:ln>
+            <a:noFill/>
+          </a:ln>
+          <a:effectLst/>
+        </p:spPr>
+        <p:style>
+          <a:lnRef idx="1">
+            <a:schemeClr val="accent1"/>
+          </a:lnRef>
+          <a:fillRef idx="3">
+            <a:schemeClr val="accent1"/>
+          </a:fillRef>
+          <a:effectRef idx="2">
+            <a:schemeClr val="accent1"/>
+          </a:effectRef>
+          <a:fontRef idx="minor">
+            <a:schemeClr val="lt1"/>
+          </a:fontRef>
+        </p:style>
+        <p:txBody>
+          <a:bodyPr rtlCol="0" anchor="ctr"/>
+          <a:lstStyle/>
+          <a:p>
+            <a:pPr algn="ctr"/>
+          </a:p>
+        </p:txBody>
+      </p:sp>
+      <p:sp>
+        <p:nvSpPr>
+          <p:cNvPr id="4" name="TextBox 3"/>
+          <p:cNvSpPr txBox="1"/>
+          <p:nvPr/>
+        </p:nvSpPr>
+        <p:spPr>
+          <a:xfrm>
+            <a:off x="457200" y="6446520"/>
+            <a:ext cx="10058400" cy="274320"/>
+          </a:xfrm>
+          <a:prstGeom prst="rect">
+            <a:avLst/>
+          </a:prstGeom>
+          <a:noFill/>
+        </p:spPr>
+        <p:txBody>
+          <a:bodyPr wrap="square">
+            <a:spAutoFit/>
+          </a:bodyPr>
+          <a:lstStyle/>
+          <a:p>
+            <a:r>
+              <a:rPr sz="900" b="0" lang="zh-CN">
+                <a:solidFill>
+                  <a:srgbClr val="6B7480"/>
+                </a:solidFill>
+                <a:latin typeface="PingFang SC"/>
+                <a:ea typeface="PingFang SC"/>
+                <a:cs typeface="PingFang SC"/>
+              </a:rPr>
+              <a:t>Qwen3-235B-A22B Agentic RL · 长序列并行配置寻优（128k / 1M · 256 die · ZeRO-2）</a:t>
+            </a:r>
+          </a:p>
+        </p:txBody>
+      </p:sp>
+      <p:sp>
+        <p:nvSpPr>
+          <p:cNvPr id="5" name="TextBox 4"/>
+          <p:cNvSpPr txBox="1"/>
+          <p:nvPr/>
+        </p:nvSpPr>
+        <p:spPr>
+          <a:xfrm>
+            <a:off x="11338560" y="6446520"/>
+            <a:ext cx="731520" cy="274320"/>
+          </a:xfrm>
+          <a:prstGeom prst="rect">
+            <a:avLst/>
+          </a:prstGeom>
+          <a:noFill/>
+        </p:spPr>
+        <p:txBody>
+          <a:bodyPr wrap="square">
+            <a:spAutoFit/>
+          </a:bodyPr>
+          <a:lstStyle/>
+          <a:p>
+            <a:pPr algn="r"/>
+            <a:r>
+              <a:rPr sz="1000" b="1" lang="zh-CN">
+                <a:solidFill>
+                  <a:srgbClr val="6B7480"/>
+                </a:solidFill>
+                <a:latin typeface="PingFang SC"/>
+                <a:ea typeface="PingFang SC"/>
+                <a:cs typeface="PingFang SC"/>
+              </a:rPr>
+              <a:t>11</a:t>
+            </a:r>
+          </a:p>
+        </p:txBody>
+      </p:sp>
+      <p:sp>
+        <p:nvSpPr>
+          <p:cNvPr id="6" name="TextBox 5"/>
+          <p:cNvSpPr txBox="1"/>
+          <p:nvPr/>
+        </p:nvSpPr>
+        <p:spPr>
+          <a:xfrm>
+            <a:off x="502920" y="1097280"/>
+            <a:ext cx="11155680" cy="5120640"/>
+          </a:xfrm>
+          <a:prstGeom prst="rect">
+            <a:avLst/>
+          </a:prstGeom>
+          <a:noFill/>
+        </p:spPr>
+        <p:txBody>
+          <a:bodyPr wrap="square">
+            <a:spAutoFit/>
+          </a:bodyPr>
+          <a:lstStyle/>
+          <a:p>
+            <a:pPr algn="l">
+              <a:spcAft>
+                <a:spcPts val="300"/>
+              </a:spcAft>
+            </a:pPr>
+            <a:r>
+              <a:rPr sz="1300" b="1" lang="zh-CN">
+                <a:solidFill>
+                  <a:srgbClr val="C7000B"/>
+                </a:solidFill>
+                <a:latin typeface="PingFang SC"/>
+                <a:ea typeface="PingFang SC"/>
+                <a:cs typeface="PingFang SC"/>
+              </a:rPr>
+              <a:t>符号</a:t>
+            </a:r>
+          </a:p>
+          <a:p>
+            <a:pPr algn="l">
+              <a:spcAft>
+                <a:spcPts val="400"/>
+              </a:spcAft>
+            </a:pPr>
+            <a:r>
+              <a:rPr sz="1150" b="0" lang="zh-CN">
+                <a:solidFill>
+                  <a:srgbClr val="45505E"/>
+                </a:solidFill>
+                <a:latin typeface="PingFang SC"/>
+                <a:ea typeface="PingFang SC"/>
+                <a:cs typeface="PingFang SC"/>
+              </a:rPr>
+              <a:t>N=die数=256 · TP/CP/PP/DP=张量/上下文/流水/数据并行(die) · EP=CP×DP · SP=TP · S=序列长 · b=每组并发序列</a:t>
+            </a:r>
+          </a:p>
+          <a:p>
+            <a:pPr algn="l">
+              <a:spcAft>
+                <a:spcPts val="400"/>
+              </a:spcAft>
+            </a:pPr>
+            <a:r>
+              <a:rPr sz="1150" b="0" lang="zh-CN">
+                <a:solidFill>
+                  <a:srgbClr val="45505E"/>
+                </a:solidFill>
+                <a:latin typeface="PingFang SC"/>
+                <a:ea typeface="PingFang SC"/>
+                <a:cs typeface="PingFang SC"/>
+              </a:rPr>
+              <a:t>h=4096 · L=94 · 专家参数~227B / 非专家~8B · 精度 训练 BF16 / 推理权重 FP8</a:t>
+            </a:r>
+          </a:p>
+          <a:p>
+            <a:pPr algn="l">
+              <a:spcAft>
+                <a:spcPts val="300"/>
+              </a:spcAft>
+            </a:pPr>
+            <a:r>
+              <a:rPr sz="1300" b="1" lang="zh-CN">
+                <a:solidFill>
+                  <a:srgbClr val="C7000B"/>
+                </a:solidFill>
+                <a:latin typeface="PingFang SC"/>
+                <a:ea typeface="PingFang SC"/>
+                <a:cs typeface="PingFang SC"/>
+              </a:rPr>
+              <a:t>核心公式（per-die）</a:t>
+            </a:r>
+          </a:p>
+          <a:p>
+            <a:pPr algn="l">
+              <a:spcAft>
+                <a:spcPts val="400"/>
+              </a:spcAft>
+            </a:pPr>
+            <a:r>
+              <a:rPr sz="1150" b="0" lang="zh-CN">
+                <a:solidFill>
+                  <a:srgbClr val="45505E"/>
+                </a:solidFill>
+                <a:latin typeface="PingFang SC"/>
+                <a:ea typeface="PingFang SC"/>
+                <a:cs typeface="PingFang SC"/>
+              </a:rPr>
+              <a:t>N = TP×CP×PP×DP = 256      EP = CP×DP      SP = TP</a:t>
+            </a:r>
+          </a:p>
+          <a:p>
+            <a:pPr algn="l">
+              <a:spcAft>
+                <a:spcPts val="400"/>
+              </a:spcAft>
+            </a:pPr>
+            <a:r>
+              <a:rPr sz="1150" b="0" lang="zh-CN">
+                <a:solidFill>
+                  <a:srgbClr val="45505E"/>
+                </a:solidFill>
+                <a:latin typeface="PingFang SC"/>
+                <a:ea typeface="PingFang SC"/>
+                <a:cs typeface="PingFang SC"/>
+              </a:rPr>
+              <a:t>静态(ZeRO-2) = 454/(EP×PP) + 16/(TP×PP) + 13        # 专家wt + 非专家wt + 梯度优化器</a:t>
+            </a:r>
+          </a:p>
+          <a:p>
+            <a:pPr algn="l">
+              <a:spcAft>
+                <a:spcPts val="400"/>
+              </a:spcAft>
+            </a:pPr>
+            <a:r>
+              <a:rPr sz="1150" b="0" lang="zh-CN">
+                <a:solidFill>
+                  <a:srgbClr val="45505E"/>
+                </a:solidFill>
+                <a:latin typeface="PingFang SC"/>
+                <a:ea typeface="PingFang SC"/>
+                <a:cs typeface="PingFang SC"/>
+              </a:rPr>
+              <a:t>训练激活    = 101 × (S/128k) / (TP×CP)</a:t>
+            </a:r>
+          </a:p>
+          <a:p>
+            <a:pPr algn="l">
+              <a:spcAft>
+                <a:spcPts val="400"/>
+              </a:spcAft>
+            </a:pPr>
+            <a:r>
+              <a:rPr sz="1150" b="0" lang="zh-CN">
+                <a:solidFill>
+                  <a:srgbClr val="45505E"/>
+                </a:solidFill>
+                <a:latin typeface="PingFang SC"/>
+                <a:ea typeface="PingFang SC"/>
+                <a:cs typeface="PingFang SC"/>
+              </a:rPr>
+              <a:t>推理 KV/die = 25.2 × (S/128k) × b / (TP×CP)</a:t>
+            </a:r>
+          </a:p>
+          <a:p>
+            <a:pPr algn="l">
+              <a:spcAft>
+                <a:spcPts val="400"/>
+              </a:spcAft>
+            </a:pPr>
+            <a:r>
+              <a:rPr sz="1150" b="0" lang="zh-CN">
+                <a:solidFill>
+                  <a:srgbClr val="45505E"/>
+                </a:solidFill>
+                <a:latin typeface="PingFang SC"/>
+                <a:ea typeface="PingFang SC"/>
+                <a:cs typeface="PingFang SC"/>
+              </a:rPr>
+              <a:t>底座(FP8)   = 227/EP + 8/TP</a:t>
+            </a:r>
+          </a:p>
+          <a:p>
+            <a:pPr algn="l">
+              <a:spcAft>
+                <a:spcPts val="400"/>
+              </a:spcAft>
+            </a:pPr>
+            <a:r>
+              <a:rPr sz="1150" b="1" lang="zh-CN">
+                <a:solidFill>
+                  <a:srgbClr val="1F5F8B"/>
+                </a:solidFill>
+                <a:latin typeface="PingFang SC"/>
+                <a:ea typeface="PingFang SC"/>
+                <a:cs typeface="PingFang SC"/>
+              </a:rPr>
+              <a:t>单die峰值   = max(静态+激活, 底座+KV) ≤ 64 GB</a:t>
+            </a:r>
+          </a:p>
+          <a:p>
+            <a:pPr algn="l">
+              <a:spcAft>
+                <a:spcPts val="400"/>
+              </a:spcAft>
+            </a:pPr>
+            <a:r>
+              <a:rPr sz="1150" b="0" lang="zh-CN">
+                <a:solidFill>
+                  <a:srgbClr val="45505E"/>
+                </a:solidFill>
+                <a:latin typeface="PingFang SC"/>
+                <a:ea typeface="PingFang SC"/>
+                <a:cs typeface="PingFang SC"/>
+              </a:rPr>
+              <a:t>scaling     激活 ∝ S · KV ∝ b·S · 注意力 ∝ S² · CP↑ → 跨节点带宽↑</a:t>
+            </a:r>
+          </a:p>
+          <a:p>
+            <a:pPr algn="l">
+              <a:spcAft>
+                <a:spcPts val="300"/>
+              </a:spcAft>
+            </a:pPr>
+            <a:r>
+              <a:rPr sz="1300" b="1" lang="zh-CN">
+                <a:solidFill>
+                  <a:srgbClr val="C7000B"/>
+                </a:solidFill>
+                <a:latin typeface="PingFang SC"/>
+                <a:ea typeface="PingFang SC"/>
+                <a:cs typeface="PingFang SC"/>
+              </a:rPr>
+              <a:t>通信公式（每序列·每 die，训练阶段，详见第 6–9 页）</a:t>
+            </a:r>
+          </a:p>
+          <a:p>
+            <a:pPr algn="l">
+              <a:spcAft>
+                <a:spcPts val="400"/>
+              </a:spcAft>
+            </a:pPr>
+            <a:r>
+              <a:rPr sz="1150" b="0" lang="zh-CN">
+                <a:solidFill>
+                  <a:srgbClr val="45505E"/>
+                </a:solidFill>
+                <a:latin typeface="PingFang SC"/>
+                <a:ea typeface="PingFang SC"/>
+                <a:cs typeface="PingFang SC"/>
+              </a:rPr>
+              <a:t>V_TP = 4L·(TP−1)/TP·(S/CP)·h·p   V_CP = 3L·(CP−1)·(S/CP)·d_kv   V_EP = 4L·k·S/(TP·CP)·h·p</a:t>
+            </a:r>
+          </a:p>
+          <a:p>
+            <a:pPr algn="l">
+              <a:spcAft>
+                <a:spcPts val="400"/>
+              </a:spcAft>
+            </a:pPr>
+            <a:r>
+              <a:rPr sz="1150" b="0" lang="zh-CN">
+                <a:solidFill>
+                  <a:srgbClr val="45505E"/>
+                </a:solidFill>
+                <a:latin typeface="PingFang SC"/>
+                <a:ea typeface="PingFang SC"/>
+                <a:cs typeface="PingFang SC"/>
+              </a:rPr>
+              <a:t>T_comp = 3·[2·N_act·S + 2·L·h_q·S²]/(TP·CP·ηF)      τ = T_comm/T_comp = 0.7%–5.5%（A3 全可掩盖）</a:t>
+            </a:r>
+          </a:p>
+          <a:p>
+            <a:pPr algn="l">
+              <a:spcAft>
+                <a:spcPts val="400"/>
+              </a:spcAft>
+            </a:pPr>
+            <a:r>
+              <a:rPr sz="1150" b="1" lang="zh-CN">
+                <a:solidFill>
+                  <a:srgbClr val="1F5F8B"/>
+                </a:solidFill>
+                <a:latin typeface="PingFang SC"/>
+                <a:ea typeface="PingFang SC"/>
+                <a:cs typeface="PingFang SC"/>
+              </a:rPr>
+              <a:t>T_iter = ⌈B/(DP·b)⌉·(T_pf + n_out·t_dec) + (B/DP)·T_comp·(1+ε)</a:t>
+            </a:r>
+          </a:p>
+        </p:txBody>
+      </p:sp>
+    </p:spTree>
+  </p:cSld>
+  <p:clrMapOvr>
+    <a:masterClrMapping/>
+  </p:clrMapOvr>
+</p:sld>
+</file>
+
 <file path=ppt/slides/slide2.xml><?xml version="1.0" encoding="utf-8"?>
 <p:sld xmlns:a="http://schemas.openxmlformats.org/drawingml/2006/main" xmlns:p="http://schemas.openxmlformats.org/presentationml/2006/main" xmlns:r="http://schemas.openxmlformats.org/officeDocument/2006/relationships">
   <p:cSld>
@@ -7019,7 +8280,7 @@
                 <a:ea typeface="PingFang SC"/>
                 <a:cs typeface="PingFang SC"/>
               </a:rPr>
-              <a:t>4 · 选型建议与结构性结论</a:t>
+              <a:t>4 · 通信建模：新增符号·常数·公式（每序列·每 die，训练阶段）</a:t>
             </a:r>
           </a:p>
         </p:txBody>
@@ -7150,8 +8411,8 @@
           <p:nvPr/>
         </p:nvGraphicFramePr>
         <p:xfrm>
-          <a:off x="502920" y="1371600"/>
-          <a:ext cx="11155680" cy="2852928"/>
+          <a:off x="502920" y="1234440"/>
+          <a:ext cx="11155680" cy="2816352"/>
         </p:xfrm>
         <a:graphic>
           <a:graphicData uri="http://schemas.openxmlformats.org/drawingml/2006/table">
@@ -7160,11 +8421,11 @@
                 <a:tableStyleId>{5C22544A-7EE6-4342-B048-85BDC9FD1C3A}</a:tableStyleId>
               </a:tblPr>
               <a:tblGrid>
-                <a:gridCol w="2045208"/>
-                <a:gridCol w="3997452"/>
-                <a:gridCol w="5113020"/>
+                <a:gridCol w="2231136"/>
+                <a:gridCol w="6693408"/>
+                <a:gridCol w="2231136"/>
               </a:tblGrid>
-              <a:tr h="475488">
+              <a:tr h="402336">
                 <a:tc>
                   <a:txBody>
                     <a:bodyPr/>
@@ -7180,7 +8441,7 @@
                           <a:ea typeface="PingFang SC"/>
                           <a:cs typeface="PingFang SC"/>
                         </a:rPr>
-                        <a:t>维度</a:t>
+                        <a:t>符号</a:t>
                       </a:r>
                     </a:p>
                   </a:txBody>
@@ -7205,7 +8466,7 @@
                           <a:ea typeface="PingFang SC"/>
                           <a:cs typeface="PingFang SC"/>
                         </a:rPr>
-                        <a:t>128k</a:t>
+                        <a:t>含义</a:t>
                       </a:r>
                     </a:p>
                   </a:txBody>
@@ -7230,7 +8491,7 @@
                           <a:ea typeface="PingFang SC"/>
                           <a:cs typeface="PingFang SC"/>
                         </a:rPr>
-                        <a:t>1M</a:t>
+                        <a:t>取值</a:t>
                       </a:r>
                     </a:p>
                   </a:txBody>
@@ -7241,23 +8502,23 @@
                   </a:tcPr>
                 </a:tc>
               </a:tr>
-              <a:tr h="475488">
-                <a:tc>
-                  <a:txBody>
-                    <a:bodyPr wrap="square"/>
-                    <a:lstStyle/>
-                    <a:p>
-                      <a:pPr algn="l"/>
-                      <a:r>
-                        <a:rPr sz="1200" b="1" lang="zh-CN">
-                          <a:solidFill>
-                            <a:srgbClr val="222B38"/>
-                          </a:solidFill>
-                          <a:latin typeface="PingFang SC"/>
-                          <a:ea typeface="PingFang SC"/>
-                          <a:cs typeface="PingFang SC"/>
-                        </a:rPr>
-                        <a:t>显存是否紧</a:t>
+              <a:tr h="402336">
+                <a:tc>
+                  <a:txBody>
+                    <a:bodyPr wrap="square"/>
+                    <a:lstStyle/>
+                    <a:p>
+                      <a:pPr algn="l"/>
+                      <a:r>
+                        <a:rPr sz="1150" b="1" lang="zh-CN">
+                          <a:solidFill>
+                            <a:srgbClr val="222B38"/>
+                          </a:solidFill>
+                          <a:latin typeface="PingFang SC"/>
+                          <a:ea typeface="PingFang SC"/>
+                          <a:cs typeface="PingFang SC"/>
+                        </a:rPr>
+                        <a:t>h_q</a:t>
                       </a:r>
                     </a:p>
                   </a:txBody>
@@ -7274,15 +8535,15 @@
                     <a:p>
                       <a:pPr algn="l"/>
                       <a:r>
-                        <a:rPr sz="1200" b="0" lang="zh-CN">
-                          <a:solidFill>
-                            <a:srgbClr val="222B38"/>
-                          </a:solidFill>
-                          <a:latin typeface="PingFang SC"/>
-                          <a:ea typeface="PingFang SC"/>
-                          <a:cs typeface="PingFang SC"/>
-                        </a:rPr>
-                        <a:t>松（峰值 33–59 / 64）</a:t>
+                        <a:rPr sz="1150" b="0" lang="zh-CN">
+                          <a:solidFill>
+                            <a:srgbClr val="222B38"/>
+                          </a:solidFill>
+                          <a:latin typeface="PingFang SC"/>
+                          <a:ea typeface="PingFang SC"/>
+                          <a:cs typeface="PingFang SC"/>
+                        </a:rPr>
+                        <a:t>Q 头总维度（64 头 × head_dim 128）</a:t>
                       </a:r>
                     </a:p>
                   </a:txBody>
@@ -7299,15 +8560,15 @@
                     <a:p>
                       <a:pPr algn="l"/>
                       <a:r>
-                        <a:rPr sz="1200" b="0" lang="zh-CN">
-                          <a:solidFill>
-                            <a:srgbClr val="222B38"/>
-                          </a:solidFill>
-                          <a:latin typeface="PingFang SC"/>
-                          <a:ea typeface="PingFang SC"/>
-                          <a:cs typeface="PingFang SC"/>
-                        </a:rPr>
-                        <a:t>紧（56–59 / 64，须 TP×CP≥32）</a:t>
+                        <a:rPr sz="1150" b="0" lang="zh-CN">
+                          <a:solidFill>
+                            <a:srgbClr val="222B38"/>
+                          </a:solidFill>
+                          <a:latin typeface="PingFang SC"/>
+                          <a:ea typeface="PingFang SC"/>
+                          <a:cs typeface="PingFang SC"/>
+                        </a:rPr>
+                        <a:t>8192</a:t>
                       </a:r>
                     </a:p>
                   </a:txBody>
@@ -7318,23 +8579,23 @@
                   </a:tcPr>
                 </a:tc>
               </a:tr>
-              <a:tr h="475488">
-                <a:tc>
-                  <a:txBody>
-                    <a:bodyPr wrap="square"/>
-                    <a:lstStyle/>
-                    <a:p>
-                      <a:pPr algn="l"/>
-                      <a:r>
-                        <a:rPr sz="1200" b="1" lang="zh-CN">
-                          <a:solidFill>
-                            <a:srgbClr val="222B38"/>
-                          </a:solidFill>
-                          <a:latin typeface="PingFang SC"/>
-                          <a:ea typeface="PingFang SC"/>
-                          <a:cs typeface="PingFang SC"/>
-                        </a:rPr>
-                        <a:t>主导旋钮</a:t>
+              <a:tr h="402336">
+                <a:tc>
+                  <a:txBody>
+                    <a:bodyPr wrap="square"/>
+                    <a:lstStyle/>
+                    <a:p>
+                      <a:pPr algn="l"/>
+                      <a:r>
+                        <a:rPr sz="1150" b="1" lang="zh-CN">
+                          <a:solidFill>
+                            <a:srgbClr val="222B38"/>
+                          </a:solidFill>
+                          <a:latin typeface="PingFang SC"/>
+                          <a:ea typeface="PingFang SC"/>
+                          <a:cs typeface="PingFang SC"/>
+                        </a:rPr>
+                        <a:t>d_kv</a:t>
                       </a:r>
                     </a:p>
                   </a:txBody>
@@ -7351,15 +8612,15 @@
                     <a:p>
                       <a:pPr algn="l"/>
                       <a:r>
-                        <a:rPr sz="1200" b="0" lang="zh-CN">
-                          <a:solidFill>
-                            <a:srgbClr val="222B38"/>
-                          </a:solidFill>
-                          <a:latin typeface="PingFang SC"/>
-                          <a:ea typeface="PingFang SC"/>
-                          <a:cs typeface="PingFang SC"/>
-                        </a:rPr>
-                        <a:t>b（并发）</a:t>
+                        <a:rPr sz="1150" b="0" lang="zh-CN">
+                          <a:solidFill>
+                            <a:srgbClr val="222B38"/>
+                          </a:solidFill>
+                          <a:latin typeface="PingFang SC"/>
+                          <a:ea typeface="PingFang SC"/>
+                          <a:cs typeface="PingFang SC"/>
+                        </a:rPr>
+                        <a:t>每 token 每层 KV 字节（K+V 各 512 维 × BF16）</a:t>
                       </a:r>
                     </a:p>
                   </a:txBody>
@@ -7376,15 +8637,15 @@
                     <a:p>
                       <a:pPr algn="l"/>
                       <a:r>
-                        <a:rPr sz="1200" b="0" lang="zh-CN">
-                          <a:solidFill>
-                            <a:srgbClr val="222B38"/>
-                          </a:solidFill>
-                          <a:latin typeface="PingFang SC"/>
-                          <a:ea typeface="PingFang SC"/>
-                          <a:cs typeface="PingFang SC"/>
-                        </a:rPr>
-                        <a:t>CP（序列缩放）</a:t>
+                        <a:rPr sz="1150" b="0" lang="zh-CN">
+                          <a:solidFill>
+                            <a:srgbClr val="222B38"/>
+                          </a:solidFill>
+                          <a:latin typeface="PingFang SC"/>
+                          <a:ea typeface="PingFang SC"/>
+                          <a:cs typeface="PingFang SC"/>
+                        </a:rPr>
+                        <a:t>2 KB</a:t>
                       </a:r>
                     </a:p>
                   </a:txBody>
@@ -7395,23 +8656,23 @@
                   </a:tcPr>
                 </a:tc>
               </a:tr>
-              <a:tr h="475488">
-                <a:tc>
-                  <a:txBody>
-                    <a:bodyPr wrap="square"/>
-                    <a:lstStyle/>
-                    <a:p>
-                      <a:pPr algn="l"/>
-                      <a:r>
-                        <a:rPr sz="1200" b="1" lang="zh-CN">
-                          <a:solidFill>
-                            <a:srgbClr val="222B38"/>
-                          </a:solidFill>
-                          <a:latin typeface="PingFang SC"/>
-                          <a:ea typeface="PingFang SC"/>
-                          <a:cs typeface="PingFang SC"/>
-                        </a:rPr>
-                        <a:t>默认推荐</a:t>
+              <a:tr h="402336">
+                <a:tc>
+                  <a:txBody>
+                    <a:bodyPr wrap="square"/>
+                    <a:lstStyle/>
+                    <a:p>
+                      <a:pPr algn="l"/>
+                      <a:r>
+                        <a:rPr sz="1150" b="1" lang="zh-CN">
+                          <a:solidFill>
+                            <a:srgbClr val="222B38"/>
+                          </a:solidFill>
+                          <a:latin typeface="PingFang SC"/>
+                          <a:ea typeface="PingFang SC"/>
+                          <a:cs typeface="PingFang SC"/>
+                        </a:rPr>
+                        <a:t>k / p / N_act</a:t>
                       </a:r>
                     </a:p>
                   </a:txBody>
@@ -7428,15 +8689,15 @@
                     <a:p>
                       <a:pPr algn="l"/>
                       <a:r>
-                        <a:rPr sz="1200" b="0" lang="zh-CN">
-                          <a:solidFill>
-                            <a:srgbClr val="222B38"/>
-                          </a:solidFill>
-                          <a:latin typeface="PingFang SC"/>
-                          <a:ea typeface="PingFang SC"/>
-                          <a:cs typeface="PingFang SC"/>
-                        </a:rPr>
-                        <a:t>T1  TP8·CP1·DP32（吞吐）</a:t>
+                        <a:rPr sz="1150" b="0" lang="zh-CN">
+                          <a:solidFill>
+                            <a:srgbClr val="222B38"/>
+                          </a:solidFill>
+                          <a:latin typeface="PingFang SC"/>
+                          <a:ea typeface="PingFang SC"/>
+                          <a:cs typeface="PingFang SC"/>
+                        </a:rPr>
+                        <a:t>MoE top-k / 激活字节(BF16) / 每token激活参数</a:t>
                       </a:r>
                     </a:p>
                   </a:txBody>
@@ -7453,15 +8714,15 @@
                     <a:p>
                       <a:pPr algn="l"/>
                       <a:r>
-                        <a:rPr sz="1200" b="0" lang="zh-CN">
-                          <a:solidFill>
-                            <a:srgbClr val="222B38"/>
-                          </a:solidFill>
-                          <a:latin typeface="PingFang SC"/>
-                          <a:ea typeface="PingFang SC"/>
-                          <a:cs typeface="PingFang SC"/>
-                        </a:rPr>
-                        <a:t>T2  TP8·CP4·DP8（吞吐，CP 最小）</a:t>
+                        <a:rPr sz="1150" b="0" lang="zh-CN">
+                          <a:solidFill>
+                            <a:srgbClr val="222B38"/>
+                          </a:solidFill>
+                          <a:latin typeface="PingFang SC"/>
+                          <a:ea typeface="PingFang SC"/>
+                          <a:cs typeface="PingFang SC"/>
+                        </a:rPr>
+                        <a:t>8 / 2B / 22B</a:t>
                       </a:r>
                     </a:p>
                   </a:txBody>
@@ -7472,23 +8733,23 @@
                   </a:tcPr>
                 </a:tc>
               </a:tr>
-              <a:tr h="475488">
-                <a:tc>
-                  <a:txBody>
-                    <a:bodyPr wrap="square"/>
-                    <a:lstStyle/>
-                    <a:p>
-                      <a:pPr algn="l"/>
-                      <a:r>
-                        <a:rPr sz="1200" b="1" lang="zh-CN">
-                          <a:solidFill>
-                            <a:srgbClr val="222B38"/>
-                          </a:solidFill>
-                          <a:latin typeface="PingFang SC"/>
-                          <a:ea typeface="PingFang SC"/>
-                          <a:cs typeface="PingFang SC"/>
-                        </a:rPr>
-                        <a:t>高并发选</a:t>
+              <a:tr h="402336">
+                <a:tc>
+                  <a:txBody>
+                    <a:bodyPr wrap="square"/>
+                    <a:lstStyle/>
+                    <a:p>
+                      <a:pPr algn="l"/>
+                      <a:r>
+                        <a:rPr sz="1150" b="1" lang="zh-CN">
+                          <a:solidFill>
+                            <a:srgbClr val="222B38"/>
+                          </a:solidFill>
+                          <a:latin typeface="PingFang SC"/>
+                          <a:ea typeface="PingFang SC"/>
+                          <a:cs typeface="PingFang SC"/>
+                        </a:rPr>
+                        <a:t>ηF</a:t>
                       </a:r>
                     </a:p>
                   </a:txBody>
@@ -7505,15 +8766,15 @@
                     <a:p>
                       <a:pPr algn="l"/>
                       <a:r>
-                        <a:rPr sz="1200" b="0" lang="zh-CN">
-                          <a:solidFill>
-                            <a:srgbClr val="222B38"/>
-                          </a:solidFill>
-                          <a:latin typeface="PingFang SC"/>
-                          <a:ea typeface="PingFang SC"/>
-                          <a:cs typeface="PingFang SC"/>
-                        </a:rPr>
-                        <a:t>B1  TP8·CP2·DP16, b=32</a:t>
+                        <a:rPr sz="1150" b="0" lang="zh-CN">
+                          <a:solidFill>
+                            <a:srgbClr val="222B38"/>
+                          </a:solidFill>
+                          <a:latin typeface="PingFang SC"/>
+                          <a:ea typeface="PingFang SC"/>
+                          <a:cs typeface="PingFang SC"/>
+                        </a:rPr>
+                        <a:t>per-die 有效算力 = 376 TFLOPS × MFU 0.35（假设）</a:t>
                       </a:r>
                     </a:p>
                   </a:txBody>
@@ -7530,15 +8791,15 @@
                     <a:p>
                       <a:pPr algn="l"/>
                       <a:r>
-                        <a:rPr sz="1200" b="0" lang="zh-CN">
-                          <a:solidFill>
-                            <a:srgbClr val="222B38"/>
-                          </a:solidFill>
-                          <a:latin typeface="PingFang SC"/>
-                          <a:ea typeface="PingFang SC"/>
-                          <a:cs typeface="PingFang SC"/>
-                        </a:rPr>
-                        <a:t>C2  TP4·CP16·DP4, b=16</a:t>
+                        <a:rPr sz="1150" b="0" lang="zh-CN">
+                          <a:solidFill>
+                            <a:srgbClr val="222B38"/>
+                          </a:solidFill>
+                          <a:latin typeface="PingFang SC"/>
+                          <a:ea typeface="PingFang SC"/>
+                          <a:cs typeface="PingFang SC"/>
+                        </a:rPr>
+                        <a:t>≈132 TF</a:t>
                       </a:r>
                     </a:p>
                   </a:txBody>
@@ -7549,23 +8810,23 @@
                   </a:tcPr>
                 </a:tc>
               </a:tr>
-              <a:tr h="475488">
-                <a:tc>
-                  <a:txBody>
-                    <a:bodyPr wrap="square"/>
-                    <a:lstStyle/>
-                    <a:p>
-                      <a:pPr algn="l"/>
-                      <a:r>
-                        <a:rPr sz="1200" b="1" lang="zh-CN">
-                          <a:solidFill>
-                            <a:srgbClr val="222B38"/>
-                          </a:solidFill>
-                          <a:latin typeface="PingFang SC"/>
-                          <a:ea typeface="PingFang SC"/>
-                          <a:cs typeface="PingFang SC"/>
-                        </a:rPr>
-                        <a:t>贴合「小 TP」</a:t>
+              <a:tr h="402336">
+                <a:tc>
+                  <a:txBody>
+                    <a:bodyPr wrap="square"/>
+                    <a:lstStyle/>
+                    <a:p>
+                      <a:pPr algn="l"/>
+                      <a:r>
+                        <a:rPr sz="1150" b="1" lang="zh-CN">
+                          <a:solidFill>
+                            <a:srgbClr val="222B38"/>
+                          </a:solidFill>
+                          <a:latin typeface="PingFang SC"/>
+                          <a:ea typeface="PingFang SC"/>
+                          <a:cs typeface="PingFang SC"/>
+                        </a:rPr>
+                        <a:t>B_ub / B_roce</a:t>
                       </a:r>
                     </a:p>
                   </a:txBody>
@@ -7582,15 +8843,15 @@
                     <a:p>
                       <a:pPr algn="l"/>
                       <a:r>
-                        <a:rPr sz="1200" b="0" lang="zh-CN">
-                          <a:solidFill>
-                            <a:srgbClr val="222B38"/>
-                          </a:solidFill>
-                          <a:latin typeface="PingFang SC"/>
-                          <a:ea typeface="PingFang SC"/>
-                          <a:cs typeface="PingFang SC"/>
-                        </a:rPr>
-                        <a:t>—</a:t>
+                        <a:rPr sz="1150" b="0" lang="zh-CN">
+                          <a:solidFill>
+                            <a:srgbClr val="222B38"/>
+                          </a:solidFill>
+                          <a:latin typeface="PingFang SC"/>
+                          <a:ea typeface="PingFang SC"/>
+                          <a:cs typeface="PingFang SC"/>
+                        </a:rPr>
+                        <a:t>UB 单向 per die（392 bidi）/ A2 跨岛 RoCE</a:t>
                       </a:r>
                     </a:p>
                   </a:txBody>
@@ -7607,21 +8868,98 @@
                     <a:p>
                       <a:pPr algn="l"/>
                       <a:r>
-                        <a:rPr sz="1200" b="0" lang="zh-CN">
-                          <a:solidFill>
-                            <a:srgbClr val="222B38"/>
-                          </a:solidFill>
-                          <a:latin typeface="PingFang SC"/>
-                          <a:ea typeface="PingFang SC"/>
-                          <a:cs typeface="PingFang SC"/>
-                        </a:rPr>
-                        <a:t>B2  TP4·CP8·DP8</a:t>
+                        <a:rPr sz="1150" b="0" lang="zh-CN">
+                          <a:solidFill>
+                            <a:srgbClr val="222B38"/>
+                          </a:solidFill>
+                          <a:latin typeface="PingFang SC"/>
+                          <a:ea typeface="PingFang SC"/>
+                          <a:cs typeface="PingFang SC"/>
+                        </a:rPr>
+                        <a:t>196 / 25 GB/s</a:t>
                       </a:r>
                     </a:p>
                   </a:txBody>
                   <a:tcPr anchor="ctr" marL="45720" marR="45720" marT="18288" marB="18288">
                     <a:solidFill>
                       <a:srgbClr val="FFFFFF"/>
+                    </a:solidFill>
+                  </a:tcPr>
+                </a:tc>
+              </a:tr>
+              <a:tr h="402336">
+                <a:tc>
+                  <a:txBody>
+                    <a:bodyPr wrap="square"/>
+                    <a:lstStyle/>
+                    <a:p>
+                      <a:pPr algn="l"/>
+                      <a:r>
+                        <a:rPr sz="1150" b="1" lang="zh-CN">
+                          <a:solidFill>
+                            <a:srgbClr val="222B38"/>
+                          </a:solidFill>
+                          <a:latin typeface="PingFang SC"/>
+                          <a:ea typeface="PingFang SC"/>
+                          <a:cs typeface="PingFang SC"/>
+                        </a:rPr>
+                        <a:t>δ</a:t>
+                      </a:r>
+                    </a:p>
+                  </a:txBody>
+                  <a:tcPr anchor="ctr" marL="45720" marR="45720" marT="18288" marB="18288">
+                    <a:solidFill>
+                      <a:srgbClr val="F3F5F8"/>
+                    </a:solidFill>
+                  </a:tcPr>
+                </a:tc>
+                <a:tc>
+                  <a:txBody>
+                    <a:bodyPr wrap="square"/>
+                    <a:lstStyle/>
+                    <a:p>
+                      <a:pPr algn="l"/>
+                      <a:r>
+                        <a:rPr sz="1150" b="0" lang="zh-CN">
+                          <a:solidFill>
+                            <a:srgbClr val="222B38"/>
+                          </a:solidFill>
+                          <a:latin typeface="PingFang SC"/>
+                          <a:ea typeface="PingFang SC"/>
+                          <a:cs typeface="PingFang SC"/>
+                        </a:rPr>
+                        <a:t>集合通信启动时延</a:t>
+                      </a:r>
+                    </a:p>
+                  </a:txBody>
+                  <a:tcPr anchor="ctr" marL="45720" marR="45720" marT="18288" marB="18288">
+                    <a:solidFill>
+                      <a:srgbClr val="F3F5F8"/>
+                    </a:solidFill>
+                  </a:tcPr>
+                </a:tc>
+                <a:tc>
+                  <a:txBody>
+                    <a:bodyPr wrap="square"/>
+                    <a:lstStyle/>
+                    <a:p>
+                      <a:pPr algn="l"/>
+                      <a:r>
+                        <a:rPr sz="1150" b="0" lang="zh-CN">
+                          <a:solidFill>
+                            <a:srgbClr val="222B38"/>
+                          </a:solidFill>
+                          <a:latin typeface="PingFang SC"/>
+                          <a:ea typeface="PingFang SC"/>
+                          <a:cs typeface="PingFang SC"/>
+                        </a:rPr>
+                        <a:t>~10 µs</a:t>
+                      </a:r>
+                    </a:p>
+                  </a:txBody>
+                  <a:tcPr anchor="ctr" marL="45720" marR="45720" marT="18288" marB="18288">
+                    <a:solidFill>
+                      <a:srgbClr val="F3F5F8"/>
                     </a:solidFill>
                   </a:tcPr>
                 </a:tc>
@@ -7638,8 +8976,8 @@
         </p:nvSpPr>
         <p:spPr>
           <a:xfrm>
-            <a:off x="502920" y="4114800"/>
-            <a:ext cx="11155680" cy="2194560"/>
+            <a:off x="502920" y="3977639"/>
+            <a:ext cx="11155680" cy="2377440"/>
           </a:xfrm>
           <a:prstGeom prst="rect">
             <a:avLst/>
@@ -7654,73 +8992,91 @@
           <a:p>
             <a:pPr algn="l">
               <a:spcAft>
-                <a:spcPts val="400"/>
+                <a:spcPts val="300"/>
               </a:spcAft>
             </a:pPr>
             <a:r>
-              <a:rPr sz="1300" b="1" lang="zh-CN">
+              <a:rPr sz="1200" b="0" lang="zh-CN">
                 <a:solidFill>
-                  <a:srgbClr val="C7000B"/>
+                  <a:srgbClr val="45505E"/>
                 </a:solidFill>
                 <a:latin typeface="PingFang SC"/>
                 <a:ea typeface="PingFang SC"/>
                 <a:cs typeface="PingFang SC"/>
               </a:rPr>
-              <a:t>三个结构性结论</a:t>
+              <a:t>V_TP = 4L·(TP−1)/TP·(S/CP)·h·p          # SP 版 AG/RS（注意力块，岛内 UB）</a:t>
             </a:r>
           </a:p>
           <a:p>
             <a:pPr algn="l">
               <a:spcAft>
-                <a:spcPts val="400"/>
+                <a:spcPts val="300"/>
               </a:spcAft>
             </a:pPr>
             <a:r>
-              <a:rPr sz="1250" b="1" lang="zh-CN">
+              <a:rPr sz="1200" b="0" lang="zh-CN">
                 <a:solidFill>
-                  <a:srgbClr val="C02828"/>
+                  <a:srgbClr val="45505E"/>
                 </a:solidFill>
                 <a:latin typeface="PingFang SC"/>
                 <a:ea typeface="PingFang SC"/>
                 <a:cs typeface="PingFang SC"/>
               </a:rPr>
-              <a:t>① CP 是 1M 的命门且抬带宽：序列 all-to-all ∝ S·h，CP=4–16 跨节点量巨大 → 必须超节点 fabric（A3/950DT），A2 彻底不可行</a:t>
+              <a:t>V_CP = 3L·(CP−1)·(S/CP)·d_kv            # ring attention 传 KV(+dKV)，跨节点</a:t>
             </a:r>
           </a:p>
           <a:p>
             <a:pPr algn="l">
               <a:spcAft>
-                <a:spcPts val="400"/>
+                <a:spcPts val="300"/>
               </a:spcAft>
             </a:pPr>
             <a:r>
-              <a:rPr sz="1250" b="0" lang="zh-CN">
+              <a:rPr sz="1200" b="0" lang="zh-CN">
                 <a:solidFill>
-                  <a:srgbClr val="222B38"/>
+                  <a:srgbClr val="45505E"/>
                 </a:solidFill>
                 <a:latin typeface="PingFang SC"/>
                 <a:ea typeface="PingFang SC"/>
                 <a:cs typeface="PingFang SC"/>
               </a:rPr>
-              <a:t>② TP 上限=岛大小(8)，缩放交给 CP：TP&gt;8 跨岛得不偿失；用满 TP=8 再加 CP 是通信最省路径（T2）</a:t>
+              <a:t>V_EP = 4L·k·S/(TP·CP)·h·p               # MoE dispatch+combine，跨节点</a:t>
             </a:r>
           </a:p>
           <a:p>
             <a:pPr algn="l">
               <a:spcAft>
-                <a:spcPts val="400"/>
+                <a:spcPts val="300"/>
               </a:spcAft>
             </a:pPr>
             <a:r>
-              <a:rPr sz="1250" b="1" lang="zh-CN">
+              <a:rPr sz="1200" b="1" lang="zh-CN">
                 <a:solidFill>
-                  <a:srgbClr val="1B7F3B"/>
+                  <a:srgbClr val="1F5F8B"/>
                 </a:solidFill>
                 <a:latin typeface="PingFang SC"/>
                 <a:ea typeface="PingFang SC"/>
                 <a:cs typeface="PingFang SC"/>
               </a:rPr>
-              <a:t>③ decode 被 CP 兜住：KV/die 被 TP×CP 切到 ~25–50GB → 每步 KV 读 15–32ms；FP8 KV 再减半，是 1M rollout 关键杠杆</a:t>
+              <a:t>T_comp = 3·[2·N_act·S + 2·L·h_q·S²]/(TP·CP·ηF)     τ = T_comm/T_comp</a:t>
+            </a:r>
+          </a:p>
+          <a:p>
+            <a:pPr algn="l">
+              <a:spcAft>
+                <a:spcPts val="300"/>
+              </a:spcAft>
+            </a:pPr>
+            <a:r>
+              <a:rPr sz="1050" b="0" lang="zh-CN">
+                <a:solidFill>
+                  <a:srgbClr val="6B7480"/>
+                </a:solidFill>
+                <a:latin typeface="PingFang SC"/>
+                <a:ea typeface="PingFang SC"/>
+                <a:cs typeface="PingFang SC"/>
+              </a:rPr>
+              <a:t>约定：反向计算≈2×前向（合计×3）；TP 通信 fwd4+bwd4 ops/层；CP 反向≈2×前向；EP 反向=前向；远端占比≈1；注意力已含因果½</a:t>
             </a:r>
           </a:p>
         </p:txBody>
@@ -7793,7 +9149,7 @@
                 <a:ea typeface="PingFang SC"/>
                 <a:cs typeface="PingFang SC"/>
               </a:rPr>
-              <a:t>附录 · 符号与公式</a:t>
+              <a:t>4 · 128k 三配置：通信量 / 通信时间 / 掩盖（每序列·每 die）</a:t>
             </a:r>
           </a:p>
         </p:txBody>
@@ -7915,16 +9271,957 @@
           </a:p>
         </p:txBody>
       </p:sp>
+      <p:graphicFrame>
+        <p:nvGraphicFramePr>
+          <p:cNvPr id="6" name="Table 5"/>
+          <p:cNvGraphicFramePr>
+            <a:graphicFrameLocks noGrp="1"/>
+          </p:cNvGraphicFramePr>
+          <p:nvPr/>
+        </p:nvGraphicFramePr>
+        <p:xfrm>
+          <a:off x="502920" y="1417320"/>
+          <a:ext cx="11155674" cy="2194560"/>
+        </p:xfrm>
+        <a:graphic>
+          <a:graphicData uri="http://schemas.openxmlformats.org/drawingml/2006/table">
+            <a:tbl>
+              <a:tblPr>
+                <a:tableStyleId>{5C22544A-7EE6-4342-B048-85BDC9FD1C3A}</a:tableStyleId>
+              </a:tblPr>
+              <a:tblGrid>
+                <a:gridCol w="2248431"/>
+                <a:gridCol w="1037737"/>
+                <a:gridCol w="951259"/>
+                <a:gridCol w="1037737"/>
+                <a:gridCol w="1210693"/>
+                <a:gridCol w="1210693"/>
+                <a:gridCol w="1210693"/>
+                <a:gridCol w="864781"/>
+                <a:gridCol w="1383650"/>
+              </a:tblGrid>
+              <a:tr h="548640">
+                <a:tc>
+                  <a:txBody>
+                    <a:bodyPr/>
+                    <a:lstStyle/>
+                    <a:p>
+                      <a:pPr algn="ctr"/>
+                      <a:r>
+                        <a:rPr sz="1200" b="1" lang="zh-CN">
+                          <a:solidFill>
+                            <a:srgbClr val="FFFFFF"/>
+                          </a:solidFill>
+                          <a:latin typeface="PingFang SC"/>
+                          <a:ea typeface="PingFang SC"/>
+                          <a:cs typeface="PingFang SC"/>
+                        </a:rPr>
+                        <a:t>配置</a:t>
+                      </a:r>
+                    </a:p>
+                  </a:txBody>
+                  <a:tcPr anchor="ctr" marL="45720" marR="45720" marT="18288" marB="18288">
+                    <a:solidFill>
+                      <a:srgbClr val="222B38"/>
+                    </a:solidFill>
+                  </a:tcPr>
+                </a:tc>
+                <a:tc>
+                  <a:txBody>
+                    <a:bodyPr/>
+                    <a:lstStyle/>
+                    <a:p>
+                      <a:pPr algn="ctr"/>
+                      <a:r>
+                        <a:rPr sz="1200" b="1" lang="zh-CN">
+                          <a:solidFill>
+                            <a:srgbClr val="FFFFFF"/>
+                          </a:solidFill>
+                          <a:latin typeface="PingFang SC"/>
+                          <a:ea typeface="PingFang SC"/>
+                          <a:cs typeface="PingFang SC"/>
+                        </a:rPr>
+                        <a:t>V_TP</a:t>
+                      </a:r>
+                    </a:p>
+                  </a:txBody>
+                  <a:tcPr anchor="ctr" marL="45720" marR="45720" marT="18288" marB="18288">
+                    <a:solidFill>
+                      <a:srgbClr val="222B38"/>
+                    </a:solidFill>
+                  </a:tcPr>
+                </a:tc>
+                <a:tc>
+                  <a:txBody>
+                    <a:bodyPr/>
+                    <a:lstStyle/>
+                    <a:p>
+                      <a:pPr algn="ctr"/>
+                      <a:r>
+                        <a:rPr sz="1200" b="1" lang="zh-CN">
+                          <a:solidFill>
+                            <a:srgbClr val="FFFFFF"/>
+                          </a:solidFill>
+                          <a:latin typeface="PingFang SC"/>
+                          <a:ea typeface="PingFang SC"/>
+                          <a:cs typeface="PingFang SC"/>
+                        </a:rPr>
+                        <a:t>V_CP</a:t>
+                      </a:r>
+                    </a:p>
+                  </a:txBody>
+                  <a:tcPr anchor="ctr" marL="45720" marR="45720" marT="18288" marB="18288">
+                    <a:solidFill>
+                      <a:srgbClr val="222B38"/>
+                    </a:solidFill>
+                  </a:tcPr>
+                </a:tc>
+                <a:tc>
+                  <a:txBody>
+                    <a:bodyPr/>
+                    <a:lstStyle/>
+                    <a:p>
+                      <a:pPr algn="ctr"/>
+                      <a:r>
+                        <a:rPr sz="1200" b="1" lang="zh-CN">
+                          <a:solidFill>
+                            <a:srgbClr val="FFFFFF"/>
+                          </a:solidFill>
+                          <a:latin typeface="PingFang SC"/>
+                          <a:ea typeface="PingFang SC"/>
+                          <a:cs typeface="PingFang SC"/>
+                        </a:rPr>
+                        <a:t>V_EP</a:t>
+                      </a:r>
+                    </a:p>
+                  </a:txBody>
+                  <a:tcPr anchor="ctr" marL="45720" marR="45720" marT="18288" marB="18288">
+                    <a:solidFill>
+                      <a:srgbClr val="222B38"/>
+                    </a:solidFill>
+                  </a:tcPr>
+                </a:tc>
+                <a:tc>
+                  <a:txBody>
+                    <a:bodyPr/>
+                    <a:lstStyle/>
+                    <a:p>
+                      <a:pPr algn="ctr"/>
+                      <a:r>
+                        <a:rPr sz="1200" b="1" lang="zh-CN">
+                          <a:solidFill>
+                            <a:srgbClr val="FFFFFF"/>
+                          </a:solidFill>
+                          <a:latin typeface="PingFang SC"/>
+                          <a:ea typeface="PingFang SC"/>
+                          <a:cs typeface="PingFang SC"/>
+                        </a:rPr>
+                        <a:t>Σ通信量</a:t>
+                      </a:r>
+                    </a:p>
+                  </a:txBody>
+                  <a:tcPr anchor="ctr" marL="45720" marR="45720" marT="18288" marB="18288">
+                    <a:solidFill>
+                      <a:srgbClr val="222B38"/>
+                    </a:solidFill>
+                  </a:tcPr>
+                </a:tc>
+                <a:tc>
+                  <a:txBody>
+                    <a:bodyPr/>
+                    <a:lstStyle/>
+                    <a:p>
+                      <a:pPr algn="ctr"/>
+                      <a:r>
+                        <a:rPr sz="1200" b="1" lang="zh-CN">
+                          <a:solidFill>
+                            <a:srgbClr val="FFFFFF"/>
+                          </a:solidFill>
+                          <a:latin typeface="PingFang SC"/>
+                          <a:ea typeface="PingFang SC"/>
+                          <a:cs typeface="PingFang SC"/>
+                        </a:rPr>
+                        <a:t>Σ通信时间</a:t>
+                      </a:r>
+                    </a:p>
+                  </a:txBody>
+                  <a:tcPr anchor="ctr" marL="45720" marR="45720" marT="18288" marB="18288">
+                    <a:solidFill>
+                      <a:srgbClr val="222B38"/>
+                    </a:solidFill>
+                  </a:tcPr>
+                </a:tc>
+                <a:tc>
+                  <a:txBody>
+                    <a:bodyPr/>
+                    <a:lstStyle/>
+                    <a:p>
+                      <a:pPr algn="ctr"/>
+                      <a:r>
+                        <a:rPr sz="1200" b="1" lang="zh-CN">
+                          <a:solidFill>
+                            <a:srgbClr val="FFFFFF"/>
+                          </a:solidFill>
+                          <a:latin typeface="PingFang SC"/>
+                          <a:ea typeface="PingFang SC"/>
+                          <a:cs typeface="PingFang SC"/>
+                        </a:rPr>
+                        <a:t>计算时间</a:t>
+                      </a:r>
+                    </a:p>
+                  </a:txBody>
+                  <a:tcPr anchor="ctr" marL="45720" marR="45720" marT="18288" marB="18288">
+                    <a:solidFill>
+                      <a:srgbClr val="222B38"/>
+                    </a:solidFill>
+                  </a:tcPr>
+                </a:tc>
+                <a:tc>
+                  <a:txBody>
+                    <a:bodyPr/>
+                    <a:lstStyle/>
+                    <a:p>
+                      <a:pPr algn="ctr"/>
+                      <a:r>
+                        <a:rPr sz="1200" b="1" lang="zh-CN">
+                          <a:solidFill>
+                            <a:srgbClr val="FFFFFF"/>
+                          </a:solidFill>
+                          <a:latin typeface="PingFang SC"/>
+                          <a:ea typeface="PingFang SC"/>
+                          <a:cs typeface="PingFang SC"/>
+                        </a:rPr>
+                        <a:t>τ</a:t>
+                      </a:r>
+                    </a:p>
+                  </a:txBody>
+                  <a:tcPr anchor="ctr" marL="45720" marR="45720" marT="18288" marB="18288">
+                    <a:solidFill>
+                      <a:srgbClr val="222B38"/>
+                    </a:solidFill>
+                  </a:tcPr>
+                </a:tc>
+                <a:tc>
+                  <a:txBody>
+                    <a:bodyPr/>
+                    <a:lstStyle/>
+                    <a:p>
+                      <a:pPr algn="ctr"/>
+                      <a:r>
+                        <a:rPr sz="1200" b="1" lang="zh-CN">
+                          <a:solidFill>
+                            <a:srgbClr val="FFFFFF"/>
+                          </a:solidFill>
+                          <a:latin typeface="PingFang SC"/>
+                          <a:ea typeface="PingFang SC"/>
+                          <a:cs typeface="PingFang SC"/>
+                        </a:rPr>
+                        <a:t>掩盖判定</a:t>
+                      </a:r>
+                    </a:p>
+                  </a:txBody>
+                  <a:tcPr anchor="ctr" marL="45720" marR="45720" marT="18288" marB="18288">
+                    <a:solidFill>
+                      <a:srgbClr val="222B38"/>
+                    </a:solidFill>
+                  </a:tcPr>
+                </a:tc>
+              </a:tr>
+              <a:tr h="548640">
+                <a:tc>
+                  <a:txBody>
+                    <a:bodyPr wrap="square"/>
+                    <a:lstStyle/>
+                    <a:p>
+                      <a:pPr algn="l"/>
+                      <a:r>
+                        <a:rPr sz="1100" b="1" lang="zh-CN">
+                          <a:solidFill>
+                            <a:srgbClr val="222B38"/>
+                          </a:solidFill>
+                          <a:latin typeface="PingFang SC"/>
+                          <a:ea typeface="PingFang SC"/>
+                          <a:cs typeface="PingFang SC"/>
+                        </a:rPr>
+                        <a:t>T1  TP8·CP1·DP32</a:t>
+                      </a:r>
+                    </a:p>
+                  </a:txBody>
+                  <a:tcPr anchor="ctr" marL="45720" marR="45720" marT="18288" marB="18288">
+                    <a:solidFill>
+                      <a:srgbClr val="FFFFFF"/>
+                    </a:solidFill>
+                  </a:tcPr>
+                </a:tc>
+                <a:tc>
+                  <a:txBody>
+                    <a:bodyPr wrap="square"/>
+                    <a:lstStyle/>
+                    <a:p>
+                      <a:pPr algn="l"/>
+                      <a:r>
+                        <a:rPr sz="1100" b="0" lang="zh-CN">
+                          <a:solidFill>
+                            <a:srgbClr val="222B38"/>
+                          </a:solidFill>
+                          <a:latin typeface="PingFang SC"/>
+                          <a:ea typeface="PingFang SC"/>
+                          <a:cs typeface="PingFang SC"/>
+                        </a:rPr>
+                        <a:t>353 GB</a:t>
+                      </a:r>
+                    </a:p>
+                  </a:txBody>
+                  <a:tcPr anchor="ctr" marL="45720" marR="45720" marT="18288" marB="18288">
+                    <a:solidFill>
+                      <a:srgbClr val="FFFFFF"/>
+                    </a:solidFill>
+                  </a:tcPr>
+                </a:tc>
+                <a:tc>
+                  <a:txBody>
+                    <a:bodyPr wrap="square"/>
+                    <a:lstStyle/>
+                    <a:p>
+                      <a:pPr algn="l"/>
+                      <a:r>
+                        <a:rPr sz="1100" b="0" lang="zh-CN">
+                          <a:solidFill>
+                            <a:srgbClr val="222B38"/>
+                          </a:solidFill>
+                          <a:latin typeface="PingFang SC"/>
+                          <a:ea typeface="PingFang SC"/>
+                          <a:cs typeface="PingFang SC"/>
+                        </a:rPr>
+                        <a:t>0</a:t>
+                      </a:r>
+                    </a:p>
+                  </a:txBody>
+                  <a:tcPr anchor="ctr" marL="45720" marR="45720" marT="18288" marB="18288">
+                    <a:solidFill>
+                      <a:srgbClr val="FFFFFF"/>
+                    </a:solidFill>
+                  </a:tcPr>
+                </a:tc>
+                <a:tc>
+                  <a:txBody>
+                    <a:bodyPr wrap="square"/>
+                    <a:lstStyle/>
+                    <a:p>
+                      <a:pPr algn="l"/>
+                      <a:r>
+                        <a:rPr sz="1100" b="0" lang="zh-CN">
+                          <a:solidFill>
+                            <a:srgbClr val="222B38"/>
+                          </a:solidFill>
+                          <a:latin typeface="PingFang SC"/>
+                          <a:ea typeface="PingFang SC"/>
+                          <a:cs typeface="PingFang SC"/>
+                        </a:rPr>
+                        <a:t>404 GB</a:t>
+                      </a:r>
+                    </a:p>
+                  </a:txBody>
+                  <a:tcPr anchor="ctr" marL="45720" marR="45720" marT="18288" marB="18288">
+                    <a:solidFill>
+                      <a:srgbClr val="FFFFFF"/>
+                    </a:solidFill>
+                  </a:tcPr>
+                </a:tc>
+                <a:tc>
+                  <a:txBody>
+                    <a:bodyPr wrap="square"/>
+                    <a:lstStyle/>
+                    <a:p>
+                      <a:pPr algn="l"/>
+                      <a:r>
+                        <a:rPr sz="1100" b="0" lang="zh-CN">
+                          <a:solidFill>
+                            <a:srgbClr val="222B38"/>
+                          </a:solidFill>
+                          <a:latin typeface="PingFang SC"/>
+                          <a:ea typeface="PingFang SC"/>
+                          <a:cs typeface="PingFang SC"/>
+                        </a:rPr>
+                        <a:t>757 GB</a:t>
+                      </a:r>
+                    </a:p>
+                  </a:txBody>
+                  <a:tcPr anchor="ctr" marL="45720" marR="45720" marT="18288" marB="18288">
+                    <a:solidFill>
+                      <a:srgbClr val="FFFFFF"/>
+                    </a:solidFill>
+                  </a:tcPr>
+                </a:tc>
+                <a:tc>
+                  <a:txBody>
+                    <a:bodyPr wrap="square"/>
+                    <a:lstStyle/>
+                    <a:p>
+                      <a:pPr algn="l"/>
+                      <a:r>
+                        <a:rPr sz="1100" b="0" lang="zh-CN">
+                          <a:solidFill>
+                            <a:srgbClr val="222B38"/>
+                          </a:solidFill>
+                          <a:latin typeface="PingFang SC"/>
+                          <a:ea typeface="PingFang SC"/>
+                          <a:cs typeface="PingFang SC"/>
+                        </a:rPr>
+                        <a:t>3.9 s</a:t>
+                      </a:r>
+                    </a:p>
+                  </a:txBody>
+                  <a:tcPr anchor="ctr" marL="45720" marR="45720" marT="18288" marB="18288">
+                    <a:solidFill>
+                      <a:srgbClr val="FFFFFF"/>
+                    </a:solidFill>
+                  </a:tcPr>
+                </a:tc>
+                <a:tc>
+                  <a:txBody>
+                    <a:bodyPr wrap="square"/>
+                    <a:lstStyle/>
+                    <a:p>
+                      <a:pPr algn="l"/>
+                      <a:r>
+                        <a:rPr sz="1100" b="0" lang="zh-CN">
+                          <a:solidFill>
+                            <a:srgbClr val="222B38"/>
+                          </a:solidFill>
+                          <a:latin typeface="PingFang SC"/>
+                          <a:ea typeface="PingFang SC"/>
+                          <a:cs typeface="PingFang SC"/>
+                        </a:rPr>
+                        <a:t>91.6 s</a:t>
+                      </a:r>
+                    </a:p>
+                  </a:txBody>
+                  <a:tcPr anchor="ctr" marL="45720" marR="45720" marT="18288" marB="18288">
+                    <a:solidFill>
+                      <a:srgbClr val="FFFFFF"/>
+                    </a:solidFill>
+                  </a:tcPr>
+                </a:tc>
+                <a:tc>
+                  <a:txBody>
+                    <a:bodyPr wrap="square"/>
+                    <a:lstStyle/>
+                    <a:p>
+                      <a:pPr algn="l"/>
+                      <a:r>
+                        <a:rPr sz="1100" b="0" lang="zh-CN">
+                          <a:solidFill>
+                            <a:srgbClr val="222B38"/>
+                          </a:solidFill>
+                          <a:latin typeface="PingFang SC"/>
+                          <a:ea typeface="PingFang SC"/>
+                          <a:cs typeface="PingFang SC"/>
+                        </a:rPr>
+                        <a:t>4.2%</a:t>
+                      </a:r>
+                    </a:p>
+                  </a:txBody>
+                  <a:tcPr anchor="ctr" marL="45720" marR="45720" marT="18288" marB="18288">
+                    <a:solidFill>
+                      <a:srgbClr val="FFFFFF"/>
+                    </a:solidFill>
+                  </a:tcPr>
+                </a:tc>
+                <a:tc>
+                  <a:txBody>
+                    <a:bodyPr wrap="square"/>
+                    <a:lstStyle/>
+                    <a:p>
+                      <a:pPr algn="l"/>
+                      <a:r>
+                        <a:rPr sz="1100" b="1" lang="zh-CN">
+                          <a:solidFill>
+                            <a:srgbClr val="1B7F3B"/>
+                          </a:solidFill>
+                          <a:latin typeface="PingFang SC"/>
+                          <a:ea typeface="PingFang SC"/>
+                          <a:cs typeface="PingFang SC"/>
+                        </a:rPr>
+                        <a:t>✅ 可掩盖</a:t>
+                      </a:r>
+                    </a:p>
+                  </a:txBody>
+                  <a:tcPr anchor="ctr" marL="45720" marR="45720" marT="18288" marB="18288">
+                    <a:solidFill>
+                      <a:srgbClr val="FFFFFF"/>
+                    </a:solidFill>
+                  </a:tcPr>
+                </a:tc>
+              </a:tr>
+              <a:tr h="548640">
+                <a:tc>
+                  <a:txBody>
+                    <a:bodyPr wrap="square"/>
+                    <a:lstStyle/>
+                    <a:p>
+                      <a:pPr algn="l"/>
+                      <a:r>
+                        <a:rPr sz="1100" b="1" lang="zh-CN">
+                          <a:solidFill>
+                            <a:srgbClr val="222B38"/>
+                          </a:solidFill>
+                          <a:latin typeface="PingFang SC"/>
+                          <a:ea typeface="PingFang SC"/>
+                          <a:cs typeface="PingFang SC"/>
+                        </a:rPr>
+                        <a:t>B1  TP8·CP2·DP16</a:t>
+                      </a:r>
+                    </a:p>
+                  </a:txBody>
+                  <a:tcPr anchor="ctr" marL="45720" marR="45720" marT="18288" marB="18288">
+                    <a:solidFill>
+                      <a:srgbClr val="F3F5F8"/>
+                    </a:solidFill>
+                  </a:tcPr>
+                </a:tc>
+                <a:tc>
+                  <a:txBody>
+                    <a:bodyPr wrap="square"/>
+                    <a:lstStyle/>
+                    <a:p>
+                      <a:pPr algn="l"/>
+                      <a:r>
+                        <a:rPr sz="1100" b="0" lang="zh-CN">
+                          <a:solidFill>
+                            <a:srgbClr val="222B38"/>
+                          </a:solidFill>
+                          <a:latin typeface="PingFang SC"/>
+                          <a:ea typeface="PingFang SC"/>
+                          <a:cs typeface="PingFang SC"/>
+                        </a:rPr>
+                        <a:t>177 GB</a:t>
+                      </a:r>
+                    </a:p>
+                  </a:txBody>
+                  <a:tcPr anchor="ctr" marL="45720" marR="45720" marT="18288" marB="18288">
+                    <a:solidFill>
+                      <a:srgbClr val="F3F5F8"/>
+                    </a:solidFill>
+                  </a:tcPr>
+                </a:tc>
+                <a:tc>
+                  <a:txBody>
+                    <a:bodyPr wrap="square"/>
+                    <a:lstStyle/>
+                    <a:p>
+                      <a:pPr algn="l"/>
+                      <a:r>
+                        <a:rPr sz="1100" b="0" lang="zh-CN">
+                          <a:solidFill>
+                            <a:srgbClr val="222B38"/>
+                          </a:solidFill>
+                          <a:latin typeface="PingFang SC"/>
+                          <a:ea typeface="PingFang SC"/>
+                          <a:cs typeface="PingFang SC"/>
+                        </a:rPr>
+                        <a:t>38 GB</a:t>
+                      </a:r>
+                    </a:p>
+                  </a:txBody>
+                  <a:tcPr anchor="ctr" marL="45720" marR="45720" marT="18288" marB="18288">
+                    <a:solidFill>
+                      <a:srgbClr val="F3F5F8"/>
+                    </a:solidFill>
+                  </a:tcPr>
+                </a:tc>
+                <a:tc>
+                  <a:txBody>
+                    <a:bodyPr wrap="square"/>
+                    <a:lstStyle/>
+                    <a:p>
+                      <a:pPr algn="l"/>
+                      <a:r>
+                        <a:rPr sz="1100" b="0" lang="zh-CN">
+                          <a:solidFill>
+                            <a:srgbClr val="222B38"/>
+                          </a:solidFill>
+                          <a:latin typeface="PingFang SC"/>
+                          <a:ea typeface="PingFang SC"/>
+                          <a:cs typeface="PingFang SC"/>
+                        </a:rPr>
+                        <a:t>202 GB</a:t>
+                      </a:r>
+                    </a:p>
+                  </a:txBody>
+                  <a:tcPr anchor="ctr" marL="45720" marR="45720" marT="18288" marB="18288">
+                    <a:solidFill>
+                      <a:srgbClr val="F3F5F8"/>
+                    </a:solidFill>
+                  </a:tcPr>
+                </a:tc>
+                <a:tc>
+                  <a:txBody>
+                    <a:bodyPr wrap="square"/>
+                    <a:lstStyle/>
+                    <a:p>
+                      <a:pPr algn="l"/>
+                      <a:r>
+                        <a:rPr sz="1100" b="0" lang="zh-CN">
+                          <a:solidFill>
+                            <a:srgbClr val="222B38"/>
+                          </a:solidFill>
+                          <a:latin typeface="PingFang SC"/>
+                          <a:ea typeface="PingFang SC"/>
+                          <a:cs typeface="PingFang SC"/>
+                        </a:rPr>
+                        <a:t>417 GB</a:t>
+                      </a:r>
+                    </a:p>
+                  </a:txBody>
+                  <a:tcPr anchor="ctr" marL="45720" marR="45720" marT="18288" marB="18288">
+                    <a:solidFill>
+                      <a:srgbClr val="F3F5F8"/>
+                    </a:solidFill>
+                  </a:tcPr>
+                </a:tc>
+                <a:tc>
+                  <a:txBody>
+                    <a:bodyPr wrap="square"/>
+                    <a:lstStyle/>
+                    <a:p>
+                      <a:pPr algn="l"/>
+                      <a:r>
+                        <a:rPr sz="1100" b="0" lang="zh-CN">
+                          <a:solidFill>
+                            <a:srgbClr val="222B38"/>
+                          </a:solidFill>
+                          <a:latin typeface="PingFang SC"/>
+                          <a:ea typeface="PingFang SC"/>
+                          <a:cs typeface="PingFang SC"/>
+                        </a:rPr>
+                        <a:t>2.1 s</a:t>
+                      </a:r>
+                    </a:p>
+                  </a:txBody>
+                  <a:tcPr anchor="ctr" marL="45720" marR="45720" marT="18288" marB="18288">
+                    <a:solidFill>
+                      <a:srgbClr val="F3F5F8"/>
+                    </a:solidFill>
+                  </a:tcPr>
+                </a:tc>
+                <a:tc>
+                  <a:txBody>
+                    <a:bodyPr wrap="square"/>
+                    <a:lstStyle/>
+                    <a:p>
+                      <a:pPr algn="l"/>
+                      <a:r>
+                        <a:rPr sz="1100" b="0" lang="zh-CN">
+                          <a:solidFill>
+                            <a:srgbClr val="222B38"/>
+                          </a:solidFill>
+                          <a:latin typeface="PingFang SC"/>
+                          <a:ea typeface="PingFang SC"/>
+                          <a:cs typeface="PingFang SC"/>
+                        </a:rPr>
+                        <a:t>91.6 s</a:t>
+                      </a:r>
+                    </a:p>
+                  </a:txBody>
+                  <a:tcPr anchor="ctr" marL="45720" marR="45720" marT="18288" marB="18288">
+                    <a:solidFill>
+                      <a:srgbClr val="F3F5F8"/>
+                    </a:solidFill>
+                  </a:tcPr>
+                </a:tc>
+                <a:tc>
+                  <a:txBody>
+                    <a:bodyPr wrap="square"/>
+                    <a:lstStyle/>
+                    <a:p>
+                      <a:pPr algn="l"/>
+                      <a:r>
+                        <a:rPr sz="1100" b="0" lang="zh-CN">
+                          <a:solidFill>
+                            <a:srgbClr val="222B38"/>
+                          </a:solidFill>
+                          <a:latin typeface="PingFang SC"/>
+                          <a:ea typeface="PingFang SC"/>
+                          <a:cs typeface="PingFang SC"/>
+                        </a:rPr>
+                        <a:t>2.3%</a:t>
+                      </a:r>
+                    </a:p>
+                  </a:txBody>
+                  <a:tcPr anchor="ctr" marL="45720" marR="45720" marT="18288" marB="18288">
+                    <a:solidFill>
+                      <a:srgbClr val="F3F5F8"/>
+                    </a:solidFill>
+                  </a:tcPr>
+                </a:tc>
+                <a:tc>
+                  <a:txBody>
+                    <a:bodyPr wrap="square"/>
+                    <a:lstStyle/>
+                    <a:p>
+                      <a:pPr algn="l"/>
+                      <a:r>
+                        <a:rPr sz="1100" b="1" lang="zh-CN">
+                          <a:solidFill>
+                            <a:srgbClr val="1B7F3B"/>
+                          </a:solidFill>
+                          <a:latin typeface="PingFang SC"/>
+                          <a:ea typeface="PingFang SC"/>
+                          <a:cs typeface="PingFang SC"/>
+                        </a:rPr>
+                        <a:t>✅ 可掩盖</a:t>
+                      </a:r>
+                    </a:p>
+                  </a:txBody>
+                  <a:tcPr anchor="ctr" marL="45720" marR="45720" marT="18288" marB="18288">
+                    <a:solidFill>
+                      <a:srgbClr val="F3F5F8"/>
+                    </a:solidFill>
+                  </a:tcPr>
+                </a:tc>
+              </a:tr>
+              <a:tr h="548640">
+                <a:tc>
+                  <a:txBody>
+                    <a:bodyPr wrap="square"/>
+                    <a:lstStyle/>
+                    <a:p>
+                      <a:pPr algn="l"/>
+                      <a:r>
+                        <a:rPr sz="1100" b="1" lang="zh-CN">
+                          <a:solidFill>
+                            <a:srgbClr val="222B38"/>
+                          </a:solidFill>
+                          <a:latin typeface="PingFang SC"/>
+                          <a:ea typeface="PingFang SC"/>
+                          <a:cs typeface="PingFang SC"/>
+                        </a:rPr>
+                        <a:t>C1  TP8·CP4·DP8</a:t>
+                      </a:r>
+                    </a:p>
+                  </a:txBody>
+                  <a:tcPr anchor="ctr" marL="45720" marR="45720" marT="18288" marB="18288">
+                    <a:solidFill>
+                      <a:srgbClr val="FFFFFF"/>
+                    </a:solidFill>
+                  </a:tcPr>
+                </a:tc>
+                <a:tc>
+                  <a:txBody>
+                    <a:bodyPr wrap="square"/>
+                    <a:lstStyle/>
+                    <a:p>
+                      <a:pPr algn="l"/>
+                      <a:r>
+                        <a:rPr sz="1100" b="0" lang="zh-CN">
+                          <a:solidFill>
+                            <a:srgbClr val="222B38"/>
+                          </a:solidFill>
+                          <a:latin typeface="PingFang SC"/>
+                          <a:ea typeface="PingFang SC"/>
+                          <a:cs typeface="PingFang SC"/>
+                        </a:rPr>
+                        <a:t>88 GB</a:t>
+                      </a:r>
+                    </a:p>
+                  </a:txBody>
+                  <a:tcPr anchor="ctr" marL="45720" marR="45720" marT="18288" marB="18288">
+                    <a:solidFill>
+                      <a:srgbClr val="FFFFFF"/>
+                    </a:solidFill>
+                  </a:tcPr>
+                </a:tc>
+                <a:tc>
+                  <a:txBody>
+                    <a:bodyPr wrap="square"/>
+                    <a:lstStyle/>
+                    <a:p>
+                      <a:pPr algn="l"/>
+                      <a:r>
+                        <a:rPr sz="1100" b="0" lang="zh-CN">
+                          <a:solidFill>
+                            <a:srgbClr val="222B38"/>
+                          </a:solidFill>
+                          <a:latin typeface="PingFang SC"/>
+                          <a:ea typeface="PingFang SC"/>
+                          <a:cs typeface="PingFang SC"/>
+                        </a:rPr>
+                        <a:t>57 GB</a:t>
+                      </a:r>
+                    </a:p>
+                  </a:txBody>
+                  <a:tcPr anchor="ctr" marL="45720" marR="45720" marT="18288" marB="18288">
+                    <a:solidFill>
+                      <a:srgbClr val="FFFFFF"/>
+                    </a:solidFill>
+                  </a:tcPr>
+                </a:tc>
+                <a:tc>
+                  <a:txBody>
+                    <a:bodyPr wrap="square"/>
+                    <a:lstStyle/>
+                    <a:p>
+                      <a:pPr algn="l"/>
+                      <a:r>
+                        <a:rPr sz="1100" b="0" lang="zh-CN">
+                          <a:solidFill>
+                            <a:srgbClr val="222B38"/>
+                          </a:solidFill>
+                          <a:latin typeface="PingFang SC"/>
+                          <a:ea typeface="PingFang SC"/>
+                          <a:cs typeface="PingFang SC"/>
+                        </a:rPr>
+                        <a:t>101 GB</a:t>
+                      </a:r>
+                    </a:p>
+                  </a:txBody>
+                  <a:tcPr anchor="ctr" marL="45720" marR="45720" marT="18288" marB="18288">
+                    <a:solidFill>
+                      <a:srgbClr val="FFFFFF"/>
+                    </a:solidFill>
+                  </a:tcPr>
+                </a:tc>
+                <a:tc>
+                  <a:txBody>
+                    <a:bodyPr wrap="square"/>
+                    <a:lstStyle/>
+                    <a:p>
+                      <a:pPr algn="l"/>
+                      <a:r>
+                        <a:rPr sz="1100" b="0" lang="zh-CN">
+                          <a:solidFill>
+                            <a:srgbClr val="222B38"/>
+                          </a:solidFill>
+                          <a:latin typeface="PingFang SC"/>
+                          <a:ea typeface="PingFang SC"/>
+                          <a:cs typeface="PingFang SC"/>
+                        </a:rPr>
+                        <a:t>246 GB</a:t>
+                      </a:r>
+                    </a:p>
+                  </a:txBody>
+                  <a:tcPr anchor="ctr" marL="45720" marR="45720" marT="18288" marB="18288">
+                    <a:solidFill>
+                      <a:srgbClr val="FFFFFF"/>
+                    </a:solidFill>
+                  </a:tcPr>
+                </a:tc>
+                <a:tc>
+                  <a:txBody>
+                    <a:bodyPr wrap="square"/>
+                    <a:lstStyle/>
+                    <a:p>
+                      <a:pPr algn="l"/>
+                      <a:r>
+                        <a:rPr sz="1100" b="0" lang="zh-CN">
+                          <a:solidFill>
+                            <a:srgbClr val="222B38"/>
+                          </a:solidFill>
+                          <a:latin typeface="PingFang SC"/>
+                          <a:ea typeface="PingFang SC"/>
+                          <a:cs typeface="PingFang SC"/>
+                        </a:rPr>
+                        <a:t>1.3 s</a:t>
+                      </a:r>
+                    </a:p>
+                  </a:txBody>
+                  <a:tcPr anchor="ctr" marL="45720" marR="45720" marT="18288" marB="18288">
+                    <a:solidFill>
+                      <a:srgbClr val="FFFFFF"/>
+                    </a:solidFill>
+                  </a:tcPr>
+                </a:tc>
+                <a:tc>
+                  <a:txBody>
+                    <a:bodyPr wrap="square"/>
+                    <a:lstStyle/>
+                    <a:p>
+                      <a:pPr algn="l"/>
+                      <a:r>
+                        <a:rPr sz="1100" b="0" lang="zh-CN">
+                          <a:solidFill>
+                            <a:srgbClr val="222B38"/>
+                          </a:solidFill>
+                          <a:latin typeface="PingFang SC"/>
+                          <a:ea typeface="PingFang SC"/>
+                          <a:cs typeface="PingFang SC"/>
+                        </a:rPr>
+                        <a:t>22.9 s</a:t>
+                      </a:r>
+                    </a:p>
+                  </a:txBody>
+                  <a:tcPr anchor="ctr" marL="45720" marR="45720" marT="18288" marB="18288">
+                    <a:solidFill>
+                      <a:srgbClr val="FFFFFF"/>
+                    </a:solidFill>
+                  </a:tcPr>
+                </a:tc>
+                <a:tc>
+                  <a:txBody>
+                    <a:bodyPr wrap="square"/>
+                    <a:lstStyle/>
+                    <a:p>
+                      <a:pPr algn="l"/>
+                      <a:r>
+                        <a:rPr sz="1100" b="0" lang="zh-CN">
+                          <a:solidFill>
+                            <a:srgbClr val="222B38"/>
+                          </a:solidFill>
+                          <a:latin typeface="PingFang SC"/>
+                          <a:ea typeface="PingFang SC"/>
+                          <a:cs typeface="PingFang SC"/>
+                        </a:rPr>
+                        <a:t>5.5%</a:t>
+                      </a:r>
+                    </a:p>
+                  </a:txBody>
+                  <a:tcPr anchor="ctr" marL="45720" marR="45720" marT="18288" marB="18288">
+                    <a:solidFill>
+                      <a:srgbClr val="FFFFFF"/>
+                    </a:solidFill>
+                  </a:tcPr>
+                </a:tc>
+                <a:tc>
+                  <a:txBody>
+                    <a:bodyPr wrap="square"/>
+                    <a:lstStyle/>
+                    <a:p>
+                      <a:pPr algn="l"/>
+                      <a:r>
+                        <a:rPr sz="1100" b="1" lang="zh-CN">
+                          <a:solidFill>
+                            <a:srgbClr val="1B7F3B"/>
+                          </a:solidFill>
+                          <a:latin typeface="PingFang SC"/>
+                          <a:ea typeface="PingFang SC"/>
+                          <a:cs typeface="PingFang SC"/>
+                        </a:rPr>
+                        <a:t>✅ 可掩盖</a:t>
+                      </a:r>
+                    </a:p>
+                  </a:txBody>
+                  <a:tcPr anchor="ctr" marL="45720" marR="45720" marT="18288" marB="18288">
+                    <a:solidFill>
+                      <a:srgbClr val="FFFFFF"/>
+                    </a:solidFill>
+                  </a:tcPr>
+                </a:tc>
+              </a:tr>
+            </a:tbl>
+          </a:graphicData>
+        </a:graphic>
+      </p:graphicFrame>
       <p:sp>
         <p:nvSpPr>
-          <p:cNvPr id="6" name="TextBox 5"/>
+          <p:cNvPr id="7" name="TextBox 6"/>
           <p:cNvSpPr txBox="1"/>
           <p:nvPr/>
         </p:nvSpPr>
         <p:spPr>
           <a:xfrm>
-            <a:off x="502920" y="1097280"/>
-            <a:ext cx="11155680" cy="5120640"/>
+            <a:off x="502920" y="3840480"/>
+            <a:ext cx="11155680" cy="2377440"/>
           </a:xfrm>
           <a:prstGeom prst="rect">
             <a:avLst/>
@@ -7939,19 +10236,1924 @@
           <a:p>
             <a:pPr algn="l">
               <a:spcAft>
-                <a:spcPts val="300"/>
+                <a:spcPts val="400"/>
               </a:spcAft>
             </a:pPr>
             <a:r>
-              <a:rPr sz="1300" b="1" lang="zh-CN">
+              <a:rPr sz="1250" b="1" lang="zh-CN">
                 <a:solidFill>
-                  <a:srgbClr val="C7000B"/>
+                  <a:srgbClr val="222B38"/>
                 </a:solidFill>
                 <a:latin typeface="PingFang SC"/>
                 <a:ea typeface="PingFang SC"/>
                 <a:cs typeface="PingFang SC"/>
               </a:rPr>
-              <a:t>符号</a:t>
+              <a:t>• T1 无 CP 通信但 EP a2a 最大：每 die 分到的 token 最多（S/(TP·CP)=16k）</a:t>
+            </a:r>
+          </a:p>
+          <a:p>
+            <a:pPr algn="l">
+              <a:spcAft>
+                <a:spcPts val="400"/>
+              </a:spcAft>
+            </a:pPr>
+            <a:r>
+              <a:rPr sz="1250" b="1" lang="zh-CN">
+                <a:solidFill>
+                  <a:srgbClr val="B87A00"/>
+                </a:solidFill>
+                <a:latin typeface="PingFang SC"/>
+                <a:ea typeface="PingFang SC"/>
+                <a:cs typeface="PingFang SC"/>
+              </a:rPr>
+              <a:t>• C1 计算被 32 die 摊薄 → τ 反而最高（5.5%）：TP×CP 越大计算越薄、通信占比越高——并发优先配置的隐性代价</a:t>
+            </a:r>
+          </a:p>
+          <a:p>
+            <a:pPr algn="l">
+              <a:spcAft>
+                <a:spcPts val="400"/>
+              </a:spcAft>
+            </a:pPr>
+            <a:r>
+              <a:rPr sz="1200" b="0" lang="zh-CN">
+                <a:solidFill>
+                  <a:srgbClr val="222B38"/>
+                </a:solidFill>
+                <a:latin typeface="PingFang SC"/>
+                <a:ea typeface="PingFang SC"/>
+                <a:cs typeface="PingFang SC"/>
+              </a:rPr>
+              <a:t>• ZeRO-2 梯度同步每步 0.165s（EP32/TP8），与反向尾部重叠 → 完全掩盖</a:t>
+            </a:r>
+          </a:p>
+          <a:p>
+            <a:pPr algn="l">
+              <a:spcAft>
+                <a:spcPts val="400"/>
+              </a:spcAft>
+            </a:pPr>
+            <a:r>
+              <a:rPr sz="1200" b="0" lang="zh-CN">
+                <a:solidFill>
+                  <a:srgbClr val="222B38"/>
+                </a:solidFill>
+                <a:latin typeface="PingFang SC"/>
+                <a:ea typeface="PingFang SC"/>
+                <a:cs typeface="PingFang SC"/>
+              </a:rPr>
+              <a:t>• decode：KV_die·b ≈ 50.4GB → 31.5ms 读 + ~2ms 通信时延 ≈ 33ms/token（通信时延无法掩盖，占 ~12%）</a:t>
+            </a:r>
+          </a:p>
+        </p:txBody>
+      </p:sp>
+    </p:spTree>
+  </p:cSld>
+  <p:clrMapOvr>
+    <a:masterClrMapping/>
+  </p:clrMapOvr>
+</p:sld>
+</file>
+
+<file path=ppt/slides/slide8.xml><?xml version="1.0" encoding="utf-8"?>
+<p:sld xmlns:a="http://schemas.openxmlformats.org/drawingml/2006/main" xmlns:p="http://schemas.openxmlformats.org/presentationml/2006/main" xmlns:r="http://schemas.openxmlformats.org/officeDocument/2006/relationships">
+  <p:cSld>
+    <p:spTree>
+      <p:nvGrpSpPr>
+        <p:cNvPr id="1" name=""/>
+        <p:cNvGrpSpPr/>
+        <p:nvPr/>
+      </p:nvGrpSpPr>
+      <p:grpSpPr/>
+      <p:sp>
+        <p:nvSpPr>
+          <p:cNvPr id="2" name="Rectangle 1"/>
+          <p:cNvSpPr/>
+          <p:nvPr/>
+        </p:nvSpPr>
+        <p:spPr>
+          <a:xfrm>
+            <a:off x="0" y="0"/>
+            <a:ext cx="12191695" cy="914400"/>
+          </a:xfrm>
+          <a:prstGeom prst="rect">
+            <a:avLst/>
+          </a:prstGeom>
+          <a:solidFill>
+            <a:srgbClr val="222B38"/>
+          </a:solidFill>
+          <a:ln>
+            <a:noFill/>
+          </a:ln>
+          <a:effectLst/>
+        </p:spPr>
+        <p:style>
+          <a:lnRef idx="1">
+            <a:schemeClr val="accent1"/>
+          </a:lnRef>
+          <a:fillRef idx="3">
+            <a:schemeClr val="accent1"/>
+          </a:fillRef>
+          <a:effectRef idx="2">
+            <a:schemeClr val="accent1"/>
+          </a:effectRef>
+          <a:fontRef idx="minor">
+            <a:schemeClr val="lt1"/>
+          </a:fontRef>
+        </p:style>
+        <p:txBody>
+          <a:bodyPr rtlCol="0" anchor="ctr" lIns="457200" tIns="155448"/>
+          <a:lstStyle/>
+          <a:p>
+            <a:pPr algn="ctr"/>
+            <a:r>
+              <a:rPr sz="2100" b="1" lang="zh-CN">
+                <a:solidFill>
+                  <a:srgbClr val="FFFFFF"/>
+                </a:solidFill>
+                <a:latin typeface="PingFang SC"/>
+                <a:ea typeface="PingFang SC"/>
+                <a:cs typeface="PingFang SC"/>
+              </a:rPr>
+              <a:t>4 · 1M 三配置：通信量 / 通信时间 / 掩盖（每序列·每 die）</a:t>
+            </a:r>
+          </a:p>
+        </p:txBody>
+      </p:sp>
+      <p:sp>
+        <p:nvSpPr>
+          <p:cNvPr id="3" name="Rectangle 2"/>
+          <p:cNvSpPr/>
+          <p:nvPr/>
+        </p:nvSpPr>
+        <p:spPr>
+          <a:xfrm>
+            <a:off x="0" y="914400"/>
+            <a:ext cx="201168" cy="82296"/>
+          </a:xfrm>
+          <a:prstGeom prst="rect">
+            <a:avLst/>
+          </a:prstGeom>
+          <a:solidFill>
+            <a:srgbClr val="C7000B"/>
+          </a:solidFill>
+          <a:ln>
+            <a:noFill/>
+          </a:ln>
+          <a:effectLst/>
+        </p:spPr>
+        <p:style>
+          <a:lnRef idx="1">
+            <a:schemeClr val="accent1"/>
+          </a:lnRef>
+          <a:fillRef idx="3">
+            <a:schemeClr val="accent1"/>
+          </a:fillRef>
+          <a:effectRef idx="2">
+            <a:schemeClr val="accent1"/>
+          </a:effectRef>
+          <a:fontRef idx="minor">
+            <a:schemeClr val="lt1"/>
+          </a:fontRef>
+        </p:style>
+        <p:txBody>
+          <a:bodyPr rtlCol="0" anchor="ctr"/>
+          <a:lstStyle/>
+          <a:p>
+            <a:pPr algn="ctr"/>
+          </a:p>
+        </p:txBody>
+      </p:sp>
+      <p:sp>
+        <p:nvSpPr>
+          <p:cNvPr id="4" name="TextBox 3"/>
+          <p:cNvSpPr txBox="1"/>
+          <p:nvPr/>
+        </p:nvSpPr>
+        <p:spPr>
+          <a:xfrm>
+            <a:off x="457200" y="6446520"/>
+            <a:ext cx="10058400" cy="274320"/>
+          </a:xfrm>
+          <a:prstGeom prst="rect">
+            <a:avLst/>
+          </a:prstGeom>
+          <a:noFill/>
+        </p:spPr>
+        <p:txBody>
+          <a:bodyPr wrap="square">
+            <a:spAutoFit/>
+          </a:bodyPr>
+          <a:lstStyle/>
+          <a:p>
+            <a:r>
+              <a:rPr sz="900" b="0" lang="zh-CN">
+                <a:solidFill>
+                  <a:srgbClr val="6B7480"/>
+                </a:solidFill>
+                <a:latin typeface="PingFang SC"/>
+                <a:ea typeface="PingFang SC"/>
+                <a:cs typeface="PingFang SC"/>
+              </a:rPr>
+              <a:t>Qwen3-235B-A22B Agentic RL · 长序列并行配置寻优（128k / 1M · 256 die · ZeRO-2）</a:t>
+            </a:r>
+          </a:p>
+        </p:txBody>
+      </p:sp>
+      <p:sp>
+        <p:nvSpPr>
+          <p:cNvPr id="5" name="TextBox 4"/>
+          <p:cNvSpPr txBox="1"/>
+          <p:nvPr/>
+        </p:nvSpPr>
+        <p:spPr>
+          <a:xfrm>
+            <a:off x="11338560" y="6446520"/>
+            <a:ext cx="731520" cy="274320"/>
+          </a:xfrm>
+          <a:prstGeom prst="rect">
+            <a:avLst/>
+          </a:prstGeom>
+          <a:noFill/>
+        </p:spPr>
+        <p:txBody>
+          <a:bodyPr wrap="square">
+            <a:spAutoFit/>
+          </a:bodyPr>
+          <a:lstStyle/>
+          <a:p>
+            <a:pPr algn="r"/>
+            <a:r>
+              <a:rPr sz="1000" b="1" lang="zh-CN">
+                <a:solidFill>
+                  <a:srgbClr val="6B7480"/>
+                </a:solidFill>
+                <a:latin typeface="PingFang SC"/>
+                <a:ea typeface="PingFang SC"/>
+                <a:cs typeface="PingFang SC"/>
+              </a:rPr>
+              <a:t>8</a:t>
+            </a:r>
+          </a:p>
+        </p:txBody>
+      </p:sp>
+      <p:graphicFrame>
+        <p:nvGraphicFramePr>
+          <p:cNvPr id="6" name="Table 5"/>
+          <p:cNvGraphicFramePr>
+            <a:graphicFrameLocks noGrp="1"/>
+          </p:cNvGraphicFramePr>
+          <p:nvPr/>
+        </p:nvGraphicFramePr>
+        <p:xfrm>
+          <a:off x="502920" y="1417320"/>
+          <a:ext cx="11155674" cy="2194560"/>
+        </p:xfrm>
+        <a:graphic>
+          <a:graphicData uri="http://schemas.openxmlformats.org/drawingml/2006/table">
+            <a:tbl>
+              <a:tblPr>
+                <a:tableStyleId>{5C22544A-7EE6-4342-B048-85BDC9FD1C3A}</a:tableStyleId>
+              </a:tblPr>
+              <a:tblGrid>
+                <a:gridCol w="2248431"/>
+                <a:gridCol w="1037737"/>
+                <a:gridCol w="951259"/>
+                <a:gridCol w="1037737"/>
+                <a:gridCol w="1210693"/>
+                <a:gridCol w="1210693"/>
+                <a:gridCol w="1210693"/>
+                <a:gridCol w="864781"/>
+                <a:gridCol w="1383650"/>
+              </a:tblGrid>
+              <a:tr h="548640">
+                <a:tc>
+                  <a:txBody>
+                    <a:bodyPr/>
+                    <a:lstStyle/>
+                    <a:p>
+                      <a:pPr algn="ctr"/>
+                      <a:r>
+                        <a:rPr sz="1200" b="1" lang="zh-CN">
+                          <a:solidFill>
+                            <a:srgbClr val="FFFFFF"/>
+                          </a:solidFill>
+                          <a:latin typeface="PingFang SC"/>
+                          <a:ea typeface="PingFang SC"/>
+                          <a:cs typeface="PingFang SC"/>
+                        </a:rPr>
+                        <a:t>配置</a:t>
+                      </a:r>
+                    </a:p>
+                  </a:txBody>
+                  <a:tcPr anchor="ctr" marL="45720" marR="45720" marT="18288" marB="18288">
+                    <a:solidFill>
+                      <a:srgbClr val="222B38"/>
+                    </a:solidFill>
+                  </a:tcPr>
+                </a:tc>
+                <a:tc>
+                  <a:txBody>
+                    <a:bodyPr/>
+                    <a:lstStyle/>
+                    <a:p>
+                      <a:pPr algn="ctr"/>
+                      <a:r>
+                        <a:rPr sz="1200" b="1" lang="zh-CN">
+                          <a:solidFill>
+                            <a:srgbClr val="FFFFFF"/>
+                          </a:solidFill>
+                          <a:latin typeface="PingFang SC"/>
+                          <a:ea typeface="PingFang SC"/>
+                          <a:cs typeface="PingFang SC"/>
+                        </a:rPr>
+                        <a:t>V_TP</a:t>
+                      </a:r>
+                    </a:p>
+                  </a:txBody>
+                  <a:tcPr anchor="ctr" marL="45720" marR="45720" marT="18288" marB="18288">
+                    <a:solidFill>
+                      <a:srgbClr val="222B38"/>
+                    </a:solidFill>
+                  </a:tcPr>
+                </a:tc>
+                <a:tc>
+                  <a:txBody>
+                    <a:bodyPr/>
+                    <a:lstStyle/>
+                    <a:p>
+                      <a:pPr algn="ctr"/>
+                      <a:r>
+                        <a:rPr sz="1200" b="1" lang="zh-CN">
+                          <a:solidFill>
+                            <a:srgbClr val="FFFFFF"/>
+                          </a:solidFill>
+                          <a:latin typeface="PingFang SC"/>
+                          <a:ea typeface="PingFang SC"/>
+                          <a:cs typeface="PingFang SC"/>
+                        </a:rPr>
+                        <a:t>V_CP</a:t>
+                      </a:r>
+                    </a:p>
+                  </a:txBody>
+                  <a:tcPr anchor="ctr" marL="45720" marR="45720" marT="18288" marB="18288">
+                    <a:solidFill>
+                      <a:srgbClr val="222B38"/>
+                    </a:solidFill>
+                  </a:tcPr>
+                </a:tc>
+                <a:tc>
+                  <a:txBody>
+                    <a:bodyPr/>
+                    <a:lstStyle/>
+                    <a:p>
+                      <a:pPr algn="ctr"/>
+                      <a:r>
+                        <a:rPr sz="1200" b="1" lang="zh-CN">
+                          <a:solidFill>
+                            <a:srgbClr val="FFFFFF"/>
+                          </a:solidFill>
+                          <a:latin typeface="PingFang SC"/>
+                          <a:ea typeface="PingFang SC"/>
+                          <a:cs typeface="PingFang SC"/>
+                        </a:rPr>
+                        <a:t>V_EP</a:t>
+                      </a:r>
+                    </a:p>
+                  </a:txBody>
+                  <a:tcPr anchor="ctr" marL="45720" marR="45720" marT="18288" marB="18288">
+                    <a:solidFill>
+                      <a:srgbClr val="222B38"/>
+                    </a:solidFill>
+                  </a:tcPr>
+                </a:tc>
+                <a:tc>
+                  <a:txBody>
+                    <a:bodyPr/>
+                    <a:lstStyle/>
+                    <a:p>
+                      <a:pPr algn="ctr"/>
+                      <a:r>
+                        <a:rPr sz="1200" b="1" lang="zh-CN">
+                          <a:solidFill>
+                            <a:srgbClr val="FFFFFF"/>
+                          </a:solidFill>
+                          <a:latin typeface="PingFang SC"/>
+                          <a:ea typeface="PingFang SC"/>
+                          <a:cs typeface="PingFang SC"/>
+                        </a:rPr>
+                        <a:t>Σ通信量</a:t>
+                      </a:r>
+                    </a:p>
+                  </a:txBody>
+                  <a:tcPr anchor="ctr" marL="45720" marR="45720" marT="18288" marB="18288">
+                    <a:solidFill>
+                      <a:srgbClr val="222B38"/>
+                    </a:solidFill>
+                  </a:tcPr>
+                </a:tc>
+                <a:tc>
+                  <a:txBody>
+                    <a:bodyPr/>
+                    <a:lstStyle/>
+                    <a:p>
+                      <a:pPr algn="ctr"/>
+                      <a:r>
+                        <a:rPr sz="1200" b="1" lang="zh-CN">
+                          <a:solidFill>
+                            <a:srgbClr val="FFFFFF"/>
+                          </a:solidFill>
+                          <a:latin typeface="PingFang SC"/>
+                          <a:ea typeface="PingFang SC"/>
+                          <a:cs typeface="PingFang SC"/>
+                        </a:rPr>
+                        <a:t>Σ通信时间</a:t>
+                      </a:r>
+                    </a:p>
+                  </a:txBody>
+                  <a:tcPr anchor="ctr" marL="45720" marR="45720" marT="18288" marB="18288">
+                    <a:solidFill>
+                      <a:srgbClr val="222B38"/>
+                    </a:solidFill>
+                  </a:tcPr>
+                </a:tc>
+                <a:tc>
+                  <a:txBody>
+                    <a:bodyPr/>
+                    <a:lstStyle/>
+                    <a:p>
+                      <a:pPr algn="ctr"/>
+                      <a:r>
+                        <a:rPr sz="1200" b="1" lang="zh-CN">
+                          <a:solidFill>
+                            <a:srgbClr val="FFFFFF"/>
+                          </a:solidFill>
+                          <a:latin typeface="PingFang SC"/>
+                          <a:ea typeface="PingFang SC"/>
+                          <a:cs typeface="PingFang SC"/>
+                        </a:rPr>
+                        <a:t>计算时间</a:t>
+                      </a:r>
+                    </a:p>
+                  </a:txBody>
+                  <a:tcPr anchor="ctr" marL="45720" marR="45720" marT="18288" marB="18288">
+                    <a:solidFill>
+                      <a:srgbClr val="222B38"/>
+                    </a:solidFill>
+                  </a:tcPr>
+                </a:tc>
+                <a:tc>
+                  <a:txBody>
+                    <a:bodyPr/>
+                    <a:lstStyle/>
+                    <a:p>
+                      <a:pPr algn="ctr"/>
+                      <a:r>
+                        <a:rPr sz="1200" b="1" lang="zh-CN">
+                          <a:solidFill>
+                            <a:srgbClr val="FFFFFF"/>
+                          </a:solidFill>
+                          <a:latin typeface="PingFang SC"/>
+                          <a:ea typeface="PingFang SC"/>
+                          <a:cs typeface="PingFang SC"/>
+                        </a:rPr>
+                        <a:t>τ</a:t>
+                      </a:r>
+                    </a:p>
+                  </a:txBody>
+                  <a:tcPr anchor="ctr" marL="45720" marR="45720" marT="18288" marB="18288">
+                    <a:solidFill>
+                      <a:srgbClr val="222B38"/>
+                    </a:solidFill>
+                  </a:tcPr>
+                </a:tc>
+                <a:tc>
+                  <a:txBody>
+                    <a:bodyPr/>
+                    <a:lstStyle/>
+                    <a:p>
+                      <a:pPr algn="ctr"/>
+                      <a:r>
+                        <a:rPr sz="1200" b="1" lang="zh-CN">
+                          <a:solidFill>
+                            <a:srgbClr val="FFFFFF"/>
+                          </a:solidFill>
+                          <a:latin typeface="PingFang SC"/>
+                          <a:ea typeface="PingFang SC"/>
+                          <a:cs typeface="PingFang SC"/>
+                        </a:rPr>
+                        <a:t>掩盖判定</a:t>
+                      </a:r>
+                    </a:p>
+                  </a:txBody>
+                  <a:tcPr anchor="ctr" marL="45720" marR="45720" marT="18288" marB="18288">
+                    <a:solidFill>
+                      <a:srgbClr val="222B38"/>
+                    </a:solidFill>
+                  </a:tcPr>
+                </a:tc>
+              </a:tr>
+              <a:tr h="548640">
+                <a:tc>
+                  <a:txBody>
+                    <a:bodyPr wrap="square"/>
+                    <a:lstStyle/>
+                    <a:p>
+                      <a:pPr algn="l"/>
+                      <a:r>
+                        <a:rPr sz="1100" b="1" lang="zh-CN">
+                          <a:solidFill>
+                            <a:srgbClr val="222B38"/>
+                          </a:solidFill>
+                          <a:latin typeface="PingFang SC"/>
+                          <a:ea typeface="PingFang SC"/>
+                          <a:cs typeface="PingFang SC"/>
+                        </a:rPr>
+                        <a:t>T2  TP8·CP4·DP8</a:t>
+                      </a:r>
+                    </a:p>
+                  </a:txBody>
+                  <a:tcPr anchor="ctr" marL="45720" marR="45720" marT="18288" marB="18288">
+                    <a:solidFill>
+                      <a:srgbClr val="FFFFFF"/>
+                    </a:solidFill>
+                  </a:tcPr>
+                </a:tc>
+                <a:tc>
+                  <a:txBody>
+                    <a:bodyPr wrap="square"/>
+                    <a:lstStyle/>
+                    <a:p>
+                      <a:pPr algn="l"/>
+                      <a:r>
+                        <a:rPr sz="1100" b="0" lang="zh-CN">
+                          <a:solidFill>
+                            <a:srgbClr val="222B38"/>
+                          </a:solidFill>
+                          <a:latin typeface="PingFang SC"/>
+                          <a:ea typeface="PingFang SC"/>
+                          <a:cs typeface="PingFang SC"/>
+                        </a:rPr>
+                        <a:t>707 GB</a:t>
+                      </a:r>
+                    </a:p>
+                  </a:txBody>
+                  <a:tcPr anchor="ctr" marL="45720" marR="45720" marT="18288" marB="18288">
+                    <a:solidFill>
+                      <a:srgbClr val="FFFFFF"/>
+                    </a:solidFill>
+                  </a:tcPr>
+                </a:tc>
+                <a:tc>
+                  <a:txBody>
+                    <a:bodyPr wrap="square"/>
+                    <a:lstStyle/>
+                    <a:p>
+                      <a:pPr algn="l"/>
+                      <a:r>
+                        <a:rPr sz="1100" b="0" lang="zh-CN">
+                          <a:solidFill>
+                            <a:srgbClr val="222B38"/>
+                          </a:solidFill>
+                          <a:latin typeface="PingFang SC"/>
+                          <a:ea typeface="PingFang SC"/>
+                          <a:cs typeface="PingFang SC"/>
+                        </a:rPr>
+                        <a:t>454 GB</a:t>
+                      </a:r>
+                    </a:p>
+                  </a:txBody>
+                  <a:tcPr anchor="ctr" marL="45720" marR="45720" marT="18288" marB="18288">
+                    <a:solidFill>
+                      <a:srgbClr val="FFFFFF"/>
+                    </a:solidFill>
+                  </a:tcPr>
+                </a:tc>
+                <a:tc>
+                  <a:txBody>
+                    <a:bodyPr wrap="square"/>
+                    <a:lstStyle/>
+                    <a:p>
+                      <a:pPr algn="l"/>
+                      <a:r>
+                        <a:rPr sz="1100" b="0" lang="zh-CN">
+                          <a:solidFill>
+                            <a:srgbClr val="222B38"/>
+                          </a:solidFill>
+                          <a:latin typeface="PingFang SC"/>
+                          <a:ea typeface="PingFang SC"/>
+                          <a:cs typeface="PingFang SC"/>
+                        </a:rPr>
+                        <a:t>807 GB</a:t>
+                      </a:r>
+                    </a:p>
+                  </a:txBody>
+                  <a:tcPr anchor="ctr" marL="45720" marR="45720" marT="18288" marB="18288">
+                    <a:solidFill>
+                      <a:srgbClr val="FFFFFF"/>
+                    </a:solidFill>
+                  </a:tcPr>
+                </a:tc>
+                <a:tc>
+                  <a:txBody>
+                    <a:bodyPr wrap="square"/>
+                    <a:lstStyle/>
+                    <a:p>
+                      <a:pPr algn="l"/>
+                      <a:r>
+                        <a:rPr sz="1100" b="0" lang="zh-CN">
+                          <a:solidFill>
+                            <a:srgbClr val="222B38"/>
+                          </a:solidFill>
+                          <a:latin typeface="PingFang SC"/>
+                          <a:ea typeface="PingFang SC"/>
+                          <a:cs typeface="PingFang SC"/>
+                        </a:rPr>
+                        <a:t>1968 GB</a:t>
+                      </a:r>
+                    </a:p>
+                  </a:txBody>
+                  <a:tcPr anchor="ctr" marL="45720" marR="45720" marT="18288" marB="18288">
+                    <a:solidFill>
+                      <a:srgbClr val="FFFFFF"/>
+                    </a:solidFill>
+                  </a:tcPr>
+                </a:tc>
+                <a:tc>
+                  <a:txBody>
+                    <a:bodyPr wrap="square"/>
+                    <a:lstStyle/>
+                    <a:p>
+                      <a:pPr algn="l"/>
+                      <a:r>
+                        <a:rPr sz="1100" b="0" lang="zh-CN">
+                          <a:solidFill>
+                            <a:srgbClr val="222B38"/>
+                          </a:solidFill>
+                          <a:latin typeface="PingFang SC"/>
+                          <a:ea typeface="PingFang SC"/>
+                          <a:cs typeface="PingFang SC"/>
+                        </a:rPr>
+                        <a:t>10.1 s</a:t>
+                      </a:r>
+                    </a:p>
+                  </a:txBody>
+                  <a:tcPr anchor="ctr" marL="45720" marR="45720" marT="18288" marB="18288">
+                    <a:solidFill>
+                      <a:srgbClr val="FFFFFF"/>
+                    </a:solidFill>
+                  </a:tcPr>
+                </a:tc>
+                <a:tc>
+                  <a:txBody>
+                    <a:bodyPr wrap="square"/>
+                    <a:lstStyle/>
+                    <a:p>
+                      <a:pPr algn="l"/>
+                      <a:r>
+                        <a:rPr sz="1100" b="0" lang="zh-CN">
+                          <a:solidFill>
+                            <a:srgbClr val="222B38"/>
+                          </a:solidFill>
+                          <a:latin typeface="PingFang SC"/>
+                          <a:ea typeface="PingFang SC"/>
+                          <a:cs typeface="PingFang SC"/>
+                        </a:rPr>
+                        <a:t>1235 s</a:t>
+                      </a:r>
+                    </a:p>
+                  </a:txBody>
+                  <a:tcPr anchor="ctr" marL="45720" marR="45720" marT="18288" marB="18288">
+                    <a:solidFill>
+                      <a:srgbClr val="FFFFFF"/>
+                    </a:solidFill>
+                  </a:tcPr>
+                </a:tc>
+                <a:tc>
+                  <a:txBody>
+                    <a:bodyPr wrap="square"/>
+                    <a:lstStyle/>
+                    <a:p>
+                      <a:pPr algn="l"/>
+                      <a:r>
+                        <a:rPr sz="1100" b="0" lang="zh-CN">
+                          <a:solidFill>
+                            <a:srgbClr val="222B38"/>
+                          </a:solidFill>
+                          <a:latin typeface="PingFang SC"/>
+                          <a:ea typeface="PingFang SC"/>
+                          <a:cs typeface="PingFang SC"/>
+                        </a:rPr>
+                        <a:t>0.8%</a:t>
+                      </a:r>
+                    </a:p>
+                  </a:txBody>
+                  <a:tcPr anchor="ctr" marL="45720" marR="45720" marT="18288" marB="18288">
+                    <a:solidFill>
+                      <a:srgbClr val="FFFFFF"/>
+                    </a:solidFill>
+                  </a:tcPr>
+                </a:tc>
+                <a:tc>
+                  <a:txBody>
+                    <a:bodyPr wrap="square"/>
+                    <a:lstStyle/>
+                    <a:p>
+                      <a:pPr algn="l"/>
+                      <a:r>
+                        <a:rPr sz="1100" b="1" lang="zh-CN">
+                          <a:solidFill>
+                            <a:srgbClr val="1B7F3B"/>
+                          </a:solidFill>
+                          <a:latin typeface="PingFang SC"/>
+                          <a:ea typeface="PingFang SC"/>
+                          <a:cs typeface="PingFang SC"/>
+                        </a:rPr>
+                        <a:t>✅ 可掩盖</a:t>
+                      </a:r>
+                    </a:p>
+                  </a:txBody>
+                  <a:tcPr anchor="ctr" marL="45720" marR="45720" marT="18288" marB="18288">
+                    <a:solidFill>
+                      <a:srgbClr val="FFFFFF"/>
+                    </a:solidFill>
+                  </a:tcPr>
+                </a:tc>
+              </a:tr>
+              <a:tr h="548640">
+                <a:tc>
+                  <a:txBody>
+                    <a:bodyPr wrap="square"/>
+                    <a:lstStyle/>
+                    <a:p>
+                      <a:pPr algn="l"/>
+                      <a:r>
+                        <a:rPr sz="1100" b="1" lang="zh-CN">
+                          <a:solidFill>
+                            <a:srgbClr val="222B38"/>
+                          </a:solidFill>
+                          <a:latin typeface="PingFang SC"/>
+                          <a:ea typeface="PingFang SC"/>
+                          <a:cs typeface="PingFang SC"/>
+                        </a:rPr>
+                        <a:t>B2  TP4·CP8·DP8</a:t>
+                      </a:r>
+                    </a:p>
+                  </a:txBody>
+                  <a:tcPr anchor="ctr" marL="45720" marR="45720" marT="18288" marB="18288">
+                    <a:solidFill>
+                      <a:srgbClr val="F3F5F8"/>
+                    </a:solidFill>
+                  </a:tcPr>
+                </a:tc>
+                <a:tc>
+                  <a:txBody>
+                    <a:bodyPr wrap="square"/>
+                    <a:lstStyle/>
+                    <a:p>
+                      <a:pPr algn="l"/>
+                      <a:r>
+                        <a:rPr sz="1100" b="0" lang="zh-CN">
+                          <a:solidFill>
+                            <a:srgbClr val="222B38"/>
+                          </a:solidFill>
+                          <a:latin typeface="PingFang SC"/>
+                          <a:ea typeface="PingFang SC"/>
+                          <a:cs typeface="PingFang SC"/>
+                        </a:rPr>
+                        <a:t>303 GB</a:t>
+                      </a:r>
+                    </a:p>
+                  </a:txBody>
+                  <a:tcPr anchor="ctr" marL="45720" marR="45720" marT="18288" marB="18288">
+                    <a:solidFill>
+                      <a:srgbClr val="F3F5F8"/>
+                    </a:solidFill>
+                  </a:tcPr>
+                </a:tc>
+                <a:tc>
+                  <a:txBody>
+                    <a:bodyPr wrap="square"/>
+                    <a:lstStyle/>
+                    <a:p>
+                      <a:pPr algn="l"/>
+                      <a:r>
+                        <a:rPr sz="1100" b="0" lang="zh-CN">
+                          <a:solidFill>
+                            <a:srgbClr val="222B38"/>
+                          </a:solidFill>
+                          <a:latin typeface="PingFang SC"/>
+                          <a:ea typeface="PingFang SC"/>
+                          <a:cs typeface="PingFang SC"/>
+                        </a:rPr>
+                        <a:t>530 GB</a:t>
+                      </a:r>
+                    </a:p>
+                  </a:txBody>
+                  <a:tcPr anchor="ctr" marL="45720" marR="45720" marT="18288" marB="18288">
+                    <a:solidFill>
+                      <a:srgbClr val="F3F5F8"/>
+                    </a:solidFill>
+                  </a:tcPr>
+                </a:tc>
+                <a:tc>
+                  <a:txBody>
+                    <a:bodyPr wrap="square"/>
+                    <a:lstStyle/>
+                    <a:p>
+                      <a:pPr algn="l"/>
+                      <a:r>
+                        <a:rPr sz="1100" b="0" lang="zh-CN">
+                          <a:solidFill>
+                            <a:srgbClr val="222B38"/>
+                          </a:solidFill>
+                          <a:latin typeface="PingFang SC"/>
+                          <a:ea typeface="PingFang SC"/>
+                          <a:cs typeface="PingFang SC"/>
+                        </a:rPr>
+                        <a:t>807 GB</a:t>
+                      </a:r>
+                    </a:p>
+                  </a:txBody>
+                  <a:tcPr anchor="ctr" marL="45720" marR="45720" marT="18288" marB="18288">
+                    <a:solidFill>
+                      <a:srgbClr val="F3F5F8"/>
+                    </a:solidFill>
+                  </a:tcPr>
+                </a:tc>
+                <a:tc>
+                  <a:txBody>
+                    <a:bodyPr wrap="square"/>
+                    <a:lstStyle/>
+                    <a:p>
+                      <a:pPr algn="l"/>
+                      <a:r>
+                        <a:rPr sz="1100" b="0" lang="zh-CN">
+                          <a:solidFill>
+                            <a:srgbClr val="222B38"/>
+                          </a:solidFill>
+                          <a:latin typeface="PingFang SC"/>
+                          <a:ea typeface="PingFang SC"/>
+                          <a:cs typeface="PingFang SC"/>
+                        </a:rPr>
+                        <a:t>1640 GB</a:t>
+                      </a:r>
+                    </a:p>
+                  </a:txBody>
+                  <a:tcPr anchor="ctr" marL="45720" marR="45720" marT="18288" marB="18288">
+                    <a:solidFill>
+                      <a:srgbClr val="F3F5F8"/>
+                    </a:solidFill>
+                  </a:tcPr>
+                </a:tc>
+                <a:tc>
+                  <a:txBody>
+                    <a:bodyPr wrap="square"/>
+                    <a:lstStyle/>
+                    <a:p>
+                      <a:pPr algn="l"/>
+                      <a:r>
+                        <a:rPr sz="1100" b="0" lang="zh-CN">
+                          <a:solidFill>
+                            <a:srgbClr val="222B38"/>
+                          </a:solidFill>
+                          <a:latin typeface="PingFang SC"/>
+                          <a:ea typeface="PingFang SC"/>
+                          <a:cs typeface="PingFang SC"/>
+                        </a:rPr>
+                        <a:t>8.4 s</a:t>
+                      </a:r>
+                    </a:p>
+                  </a:txBody>
+                  <a:tcPr anchor="ctr" marL="45720" marR="45720" marT="18288" marB="18288">
+                    <a:solidFill>
+                      <a:srgbClr val="F3F5F8"/>
+                    </a:solidFill>
+                  </a:tcPr>
+                </a:tc>
+                <a:tc>
+                  <a:txBody>
+                    <a:bodyPr wrap="square"/>
+                    <a:lstStyle/>
+                    <a:p>
+                      <a:pPr algn="l"/>
+                      <a:r>
+                        <a:rPr sz="1100" b="0" lang="zh-CN">
+                          <a:solidFill>
+                            <a:srgbClr val="222B38"/>
+                          </a:solidFill>
+                          <a:latin typeface="PingFang SC"/>
+                          <a:ea typeface="PingFang SC"/>
+                          <a:cs typeface="PingFang SC"/>
+                        </a:rPr>
+                        <a:t>1235 s</a:t>
+                      </a:r>
+                    </a:p>
+                  </a:txBody>
+                  <a:tcPr anchor="ctr" marL="45720" marR="45720" marT="18288" marB="18288">
+                    <a:solidFill>
+                      <a:srgbClr val="F3F5F8"/>
+                    </a:solidFill>
+                  </a:tcPr>
+                </a:tc>
+                <a:tc>
+                  <a:txBody>
+                    <a:bodyPr wrap="square"/>
+                    <a:lstStyle/>
+                    <a:p>
+                      <a:pPr algn="l"/>
+                      <a:r>
+                        <a:rPr sz="1100" b="0" lang="zh-CN">
+                          <a:solidFill>
+                            <a:srgbClr val="222B38"/>
+                          </a:solidFill>
+                          <a:latin typeface="PingFang SC"/>
+                          <a:ea typeface="PingFang SC"/>
+                          <a:cs typeface="PingFang SC"/>
+                        </a:rPr>
+                        <a:t>0.7%</a:t>
+                      </a:r>
+                    </a:p>
+                  </a:txBody>
+                  <a:tcPr anchor="ctr" marL="45720" marR="45720" marT="18288" marB="18288">
+                    <a:solidFill>
+                      <a:srgbClr val="F3F5F8"/>
+                    </a:solidFill>
+                  </a:tcPr>
+                </a:tc>
+                <a:tc>
+                  <a:txBody>
+                    <a:bodyPr wrap="square"/>
+                    <a:lstStyle/>
+                    <a:p>
+                      <a:pPr algn="l"/>
+                      <a:r>
+                        <a:rPr sz="1100" b="1" lang="zh-CN">
+                          <a:solidFill>
+                            <a:srgbClr val="1B7F3B"/>
+                          </a:solidFill>
+                          <a:latin typeface="PingFang SC"/>
+                          <a:ea typeface="PingFang SC"/>
+                          <a:cs typeface="PingFang SC"/>
+                        </a:rPr>
+                        <a:t>✅ 可掩盖</a:t>
+                      </a:r>
+                    </a:p>
+                  </a:txBody>
+                  <a:tcPr anchor="ctr" marL="45720" marR="45720" marT="18288" marB="18288">
+                    <a:solidFill>
+                      <a:srgbClr val="F3F5F8"/>
+                    </a:solidFill>
+                  </a:tcPr>
+                </a:tc>
+              </a:tr>
+              <a:tr h="548640">
+                <a:tc>
+                  <a:txBody>
+                    <a:bodyPr wrap="square"/>
+                    <a:lstStyle/>
+                    <a:p>
+                      <a:pPr algn="l"/>
+                      <a:r>
+                        <a:rPr sz="1100" b="1" lang="zh-CN">
+                          <a:solidFill>
+                            <a:srgbClr val="222B38"/>
+                          </a:solidFill>
+                          <a:latin typeface="PingFang SC"/>
+                          <a:ea typeface="PingFang SC"/>
+                          <a:cs typeface="PingFang SC"/>
+                        </a:rPr>
+                        <a:t>C2  TP4·CP16·DP4</a:t>
+                      </a:r>
+                    </a:p>
+                  </a:txBody>
+                  <a:tcPr anchor="ctr" marL="45720" marR="45720" marT="18288" marB="18288">
+                    <a:solidFill>
+                      <a:srgbClr val="FFFFFF"/>
+                    </a:solidFill>
+                  </a:tcPr>
+                </a:tc>
+                <a:tc>
+                  <a:txBody>
+                    <a:bodyPr wrap="square"/>
+                    <a:lstStyle/>
+                    <a:p>
+                      <a:pPr algn="l"/>
+                      <a:r>
+                        <a:rPr sz="1100" b="0" lang="zh-CN">
+                          <a:solidFill>
+                            <a:srgbClr val="222B38"/>
+                          </a:solidFill>
+                          <a:latin typeface="PingFang SC"/>
+                          <a:ea typeface="PingFang SC"/>
+                          <a:cs typeface="PingFang SC"/>
+                        </a:rPr>
+                        <a:t>151 GB</a:t>
+                      </a:r>
+                    </a:p>
+                  </a:txBody>
+                  <a:tcPr anchor="ctr" marL="45720" marR="45720" marT="18288" marB="18288">
+                    <a:solidFill>
+                      <a:srgbClr val="FFFFFF"/>
+                    </a:solidFill>
+                  </a:tcPr>
+                </a:tc>
+                <a:tc>
+                  <a:txBody>
+                    <a:bodyPr wrap="square"/>
+                    <a:lstStyle/>
+                    <a:p>
+                      <a:pPr algn="l"/>
+                      <a:r>
+                        <a:rPr sz="1100" b="0" lang="zh-CN">
+                          <a:solidFill>
+                            <a:srgbClr val="222B38"/>
+                          </a:solidFill>
+                          <a:latin typeface="PingFang SC"/>
+                          <a:ea typeface="PingFang SC"/>
+                          <a:cs typeface="PingFang SC"/>
+                        </a:rPr>
+                        <a:t>568 GB</a:t>
+                      </a:r>
+                    </a:p>
+                  </a:txBody>
+                  <a:tcPr anchor="ctr" marL="45720" marR="45720" marT="18288" marB="18288">
+                    <a:solidFill>
+                      <a:srgbClr val="FFFFFF"/>
+                    </a:solidFill>
+                  </a:tcPr>
+                </a:tc>
+                <a:tc>
+                  <a:txBody>
+                    <a:bodyPr wrap="square"/>
+                    <a:lstStyle/>
+                    <a:p>
+                      <a:pPr algn="l"/>
+                      <a:r>
+                        <a:rPr sz="1100" b="0" lang="zh-CN">
+                          <a:solidFill>
+                            <a:srgbClr val="222B38"/>
+                          </a:solidFill>
+                          <a:latin typeface="PingFang SC"/>
+                          <a:ea typeface="PingFang SC"/>
+                          <a:cs typeface="PingFang SC"/>
+                        </a:rPr>
+                        <a:t>404 GB</a:t>
+                      </a:r>
+                    </a:p>
+                  </a:txBody>
+                  <a:tcPr anchor="ctr" marL="45720" marR="45720" marT="18288" marB="18288">
+                    <a:solidFill>
+                      <a:srgbClr val="FFFFFF"/>
+                    </a:solidFill>
+                  </a:tcPr>
+                </a:tc>
+                <a:tc>
+                  <a:txBody>
+                    <a:bodyPr wrap="square"/>
+                    <a:lstStyle/>
+                    <a:p>
+                      <a:pPr algn="l"/>
+                      <a:r>
+                        <a:rPr sz="1100" b="0" lang="zh-CN">
+                          <a:solidFill>
+                            <a:srgbClr val="222B38"/>
+                          </a:solidFill>
+                          <a:latin typeface="PingFang SC"/>
+                          <a:ea typeface="PingFang SC"/>
+                          <a:cs typeface="PingFang SC"/>
+                        </a:rPr>
+                        <a:t>1123 GB</a:t>
+                      </a:r>
+                    </a:p>
+                  </a:txBody>
+                  <a:tcPr anchor="ctr" marL="45720" marR="45720" marT="18288" marB="18288">
+                    <a:solidFill>
+                      <a:srgbClr val="FFFFFF"/>
+                    </a:solidFill>
+                  </a:tcPr>
+                </a:tc>
+                <a:tc>
+                  <a:txBody>
+                    <a:bodyPr wrap="square"/>
+                    <a:lstStyle/>
+                    <a:p>
+                      <a:pPr algn="l"/>
+                      <a:r>
+                        <a:rPr sz="1100" b="0" lang="zh-CN">
+                          <a:solidFill>
+                            <a:srgbClr val="222B38"/>
+                          </a:solidFill>
+                          <a:latin typeface="PingFang SC"/>
+                          <a:ea typeface="PingFang SC"/>
+                          <a:cs typeface="PingFang SC"/>
+                        </a:rPr>
+                        <a:t>5.7 s</a:t>
+                      </a:r>
+                    </a:p>
+                  </a:txBody>
+                  <a:tcPr anchor="ctr" marL="45720" marR="45720" marT="18288" marB="18288">
+                    <a:solidFill>
+                      <a:srgbClr val="FFFFFF"/>
+                    </a:solidFill>
+                  </a:tcPr>
+                </a:tc>
+                <a:tc>
+                  <a:txBody>
+                    <a:bodyPr wrap="square"/>
+                    <a:lstStyle/>
+                    <a:p>
+                      <a:pPr algn="l"/>
+                      <a:r>
+                        <a:rPr sz="1100" b="0" lang="zh-CN">
+                          <a:solidFill>
+                            <a:srgbClr val="222B38"/>
+                          </a:solidFill>
+                          <a:latin typeface="PingFang SC"/>
+                          <a:ea typeface="PingFang SC"/>
+                          <a:cs typeface="PingFang SC"/>
+                        </a:rPr>
+                        <a:t>618 s</a:t>
+                      </a:r>
+                    </a:p>
+                  </a:txBody>
+                  <a:tcPr anchor="ctr" marL="45720" marR="45720" marT="18288" marB="18288">
+                    <a:solidFill>
+                      <a:srgbClr val="FFFFFF"/>
+                    </a:solidFill>
+                  </a:tcPr>
+                </a:tc>
+                <a:tc>
+                  <a:txBody>
+                    <a:bodyPr wrap="square"/>
+                    <a:lstStyle/>
+                    <a:p>
+                      <a:pPr algn="l"/>
+                      <a:r>
+                        <a:rPr sz="1100" b="0" lang="zh-CN">
+                          <a:solidFill>
+                            <a:srgbClr val="222B38"/>
+                          </a:solidFill>
+                          <a:latin typeface="PingFang SC"/>
+                          <a:ea typeface="PingFang SC"/>
+                          <a:cs typeface="PingFang SC"/>
+                        </a:rPr>
+                        <a:t>0.9%</a:t>
+                      </a:r>
+                    </a:p>
+                  </a:txBody>
+                  <a:tcPr anchor="ctr" marL="45720" marR="45720" marT="18288" marB="18288">
+                    <a:solidFill>
+                      <a:srgbClr val="FFFFFF"/>
+                    </a:solidFill>
+                  </a:tcPr>
+                </a:tc>
+                <a:tc>
+                  <a:txBody>
+                    <a:bodyPr wrap="square"/>
+                    <a:lstStyle/>
+                    <a:p>
+                      <a:pPr algn="l"/>
+                      <a:r>
+                        <a:rPr sz="1100" b="1" lang="zh-CN">
+                          <a:solidFill>
+                            <a:srgbClr val="1B7F3B"/>
+                          </a:solidFill>
+                          <a:latin typeface="PingFang SC"/>
+                          <a:ea typeface="PingFang SC"/>
+                          <a:cs typeface="PingFang SC"/>
+                        </a:rPr>
+                        <a:t>✅ 可掩盖</a:t>
+                      </a:r>
+                    </a:p>
+                  </a:txBody>
+                  <a:tcPr anchor="ctr" marL="45720" marR="45720" marT="18288" marB="18288">
+                    <a:solidFill>
+                      <a:srgbClr val="FFFFFF"/>
+                    </a:solidFill>
+                  </a:tcPr>
+                </a:tc>
+              </a:tr>
+            </a:tbl>
+          </a:graphicData>
+        </a:graphic>
+      </p:graphicFrame>
+      <p:sp>
+        <p:nvSpPr>
+          <p:cNvPr id="7" name="TextBox 6"/>
+          <p:cNvSpPr txBox="1"/>
+          <p:nvPr/>
+        </p:nvSpPr>
+        <p:spPr>
+          <a:xfrm>
+            <a:off x="502920" y="3840480"/>
+            <a:ext cx="11155680" cy="2377440"/>
+          </a:xfrm>
+          <a:prstGeom prst="rect">
+            <a:avLst/>
+          </a:prstGeom>
+          <a:noFill/>
+        </p:spPr>
+        <p:txBody>
+          <a:bodyPr wrap="square">
+            <a:spAutoFit/>
+          </a:bodyPr>
+          <a:lstStyle/>
+          <a:p>
+            <a:pPr algn="l">
+              <a:spcAft>
+                <a:spcPts val="400"/>
+              </a:spcAft>
+            </a:pPr>
+            <a:r>
+              <a:rPr sz="1300" b="1" lang="zh-CN">
+                <a:solidFill>
+                  <a:srgbClr val="1B7F3B"/>
+                </a:solidFill>
+                <a:latin typeface="PingFang SC"/>
+                <a:ea typeface="PingFang SC"/>
+                <a:cs typeface="PingFang SC"/>
+              </a:rPr>
+              <a:t>• 通信量绝对值是 128k 的 3–8 倍，但 τ 反而降 ~5 倍：注意力计算 ∝S²、通信 ∝S，序列越长计算越「富余」</a:t>
+            </a:r>
+          </a:p>
+          <a:p>
+            <a:pPr algn="l">
+              <a:spcAft>
+                <a:spcPts val="400"/>
+              </a:spcAft>
+            </a:pPr>
+            <a:r>
+              <a:rPr sz="1250" b="1" lang="zh-CN">
+                <a:solidFill>
+                  <a:srgbClr val="C02828"/>
+                </a:solidFill>
+                <a:latin typeface="PingFang SC"/>
+                <a:ea typeface="PingFang SC"/>
+                <a:cs typeface="PingFang SC"/>
+              </a:rPr>
+              <a:t>• 代价是绝对时间：全注意力单序列训练 1235s（≈21 min）——这是 1M 必须稀疏注意力的另一个理由</a:t>
+            </a:r>
+          </a:p>
+          <a:p>
+            <a:pPr algn="l">
+              <a:spcAft>
+                <a:spcPts val="400"/>
+              </a:spcAft>
+            </a:pPr>
+            <a:r>
+              <a:rPr sz="1200" b="0" lang="zh-CN">
+                <a:solidFill>
+                  <a:srgbClr val="222B38"/>
+                </a:solidFill>
+                <a:latin typeface="PingFang SC"/>
+                <a:ea typeface="PingFang SC"/>
+                <a:cs typeface="PingFang SC"/>
+              </a:rPr>
+              <a:t>• B2 vs T2：Σ通信 B2 少 17%，但 T2 的通信更多落在岛内 UB（V_TP 大、V_CP 小）→ 跨节点压力 T2 更小，吞吐仍 T2 优</a:t>
+            </a:r>
+          </a:p>
+        </p:txBody>
+      </p:sp>
+    </p:spTree>
+  </p:cSld>
+  <p:clrMapOvr>
+    <a:masterClrMapping/>
+  </p:clrMapOvr>
+</p:sld>
+</file>
+
+<file path=ppt/slides/slide9.xml><?xml version="1.0" encoding="utf-8"?>
+<p:sld xmlns:a="http://schemas.openxmlformats.org/drawingml/2006/main" xmlns:p="http://schemas.openxmlformats.org/presentationml/2006/main" xmlns:r="http://schemas.openxmlformats.org/officeDocument/2006/relationships">
+  <p:cSld>
+    <p:spTree>
+      <p:nvGrpSpPr>
+        <p:cNvPr id="1" name=""/>
+        <p:cNvGrpSpPr/>
+        <p:nvPr/>
+      </p:nvGrpSpPr>
+      <p:grpSpPr/>
+      <p:sp>
+        <p:nvSpPr>
+          <p:cNvPr id="2" name="Rectangle 1"/>
+          <p:cNvSpPr/>
+          <p:nvPr/>
+        </p:nvSpPr>
+        <p:spPr>
+          <a:xfrm>
+            <a:off x="0" y="0"/>
+            <a:ext cx="12191695" cy="914400"/>
+          </a:xfrm>
+          <a:prstGeom prst="rect">
+            <a:avLst/>
+          </a:prstGeom>
+          <a:solidFill>
+            <a:srgbClr val="222B38"/>
+          </a:solidFill>
+          <a:ln>
+            <a:noFill/>
+          </a:ln>
+          <a:effectLst/>
+        </p:spPr>
+        <p:style>
+          <a:lnRef idx="1">
+            <a:schemeClr val="accent1"/>
+          </a:lnRef>
+          <a:fillRef idx="3">
+            <a:schemeClr val="accent1"/>
+          </a:fillRef>
+          <a:effectRef idx="2">
+            <a:schemeClr val="accent1"/>
+          </a:effectRef>
+          <a:fontRef idx="minor">
+            <a:schemeClr val="lt1"/>
+          </a:fontRef>
+        </p:style>
+        <p:txBody>
+          <a:bodyPr rtlCol="0" anchor="ctr" lIns="457200" tIns="155448"/>
+          <a:lstStyle/>
+          <a:p>
+            <a:pPr algn="ctr"/>
+            <a:r>
+              <a:rPr sz="2100" b="1" lang="zh-CN">
+                <a:solidFill>
+                  <a:srgbClr val="FFFFFF"/>
+                </a:solidFill>
+                <a:latin typeface="PingFang SC"/>
+                <a:ea typeface="PingFang SC"/>
+                <a:cs typeface="PingFang SC"/>
+              </a:rPr>
+              <a:t>4 · 掩盖判据 · 端到端时间 · A2/稀疏敏感性</a:t>
+            </a:r>
+          </a:p>
+        </p:txBody>
+      </p:sp>
+      <p:sp>
+        <p:nvSpPr>
+          <p:cNvPr id="3" name="Rectangle 2"/>
+          <p:cNvSpPr/>
+          <p:nvPr/>
+        </p:nvSpPr>
+        <p:spPr>
+          <a:xfrm>
+            <a:off x="0" y="914400"/>
+            <a:ext cx="201168" cy="82296"/>
+          </a:xfrm>
+          <a:prstGeom prst="rect">
+            <a:avLst/>
+          </a:prstGeom>
+          <a:solidFill>
+            <a:srgbClr val="C7000B"/>
+          </a:solidFill>
+          <a:ln>
+            <a:noFill/>
+          </a:ln>
+          <a:effectLst/>
+        </p:spPr>
+        <p:style>
+          <a:lnRef idx="1">
+            <a:schemeClr val="accent1"/>
+          </a:lnRef>
+          <a:fillRef idx="3">
+            <a:schemeClr val="accent1"/>
+          </a:fillRef>
+          <a:effectRef idx="2">
+            <a:schemeClr val="accent1"/>
+          </a:effectRef>
+          <a:fontRef idx="minor">
+            <a:schemeClr val="lt1"/>
+          </a:fontRef>
+        </p:style>
+        <p:txBody>
+          <a:bodyPr rtlCol="0" anchor="ctr"/>
+          <a:lstStyle/>
+          <a:p>
+            <a:pPr algn="ctr"/>
+          </a:p>
+        </p:txBody>
+      </p:sp>
+      <p:sp>
+        <p:nvSpPr>
+          <p:cNvPr id="4" name="TextBox 3"/>
+          <p:cNvSpPr txBox="1"/>
+          <p:nvPr/>
+        </p:nvSpPr>
+        <p:spPr>
+          <a:xfrm>
+            <a:off x="457200" y="6446520"/>
+            <a:ext cx="10058400" cy="274320"/>
+          </a:xfrm>
+          <a:prstGeom prst="rect">
+            <a:avLst/>
+          </a:prstGeom>
+          <a:noFill/>
+        </p:spPr>
+        <p:txBody>
+          <a:bodyPr wrap="square">
+            <a:spAutoFit/>
+          </a:bodyPr>
+          <a:lstStyle/>
+          <a:p>
+            <a:r>
+              <a:rPr sz="900" b="0" lang="zh-CN">
+                <a:solidFill>
+                  <a:srgbClr val="6B7480"/>
+                </a:solidFill>
+                <a:latin typeface="PingFang SC"/>
+                <a:ea typeface="PingFang SC"/>
+                <a:cs typeface="PingFang SC"/>
+              </a:rPr>
+              <a:t>Qwen3-235B-A22B Agentic RL · 长序列并行配置寻优（128k / 1M · 256 die · ZeRO-2）</a:t>
+            </a:r>
+          </a:p>
+        </p:txBody>
+      </p:sp>
+      <p:sp>
+        <p:nvSpPr>
+          <p:cNvPr id="5" name="TextBox 4"/>
+          <p:cNvSpPr txBox="1"/>
+          <p:nvPr/>
+        </p:nvSpPr>
+        <p:spPr>
+          <a:xfrm>
+            <a:off x="11338560" y="6446520"/>
+            <a:ext cx="731520" cy="274320"/>
+          </a:xfrm>
+          <a:prstGeom prst="rect">
+            <a:avLst/>
+          </a:prstGeom>
+          <a:noFill/>
+        </p:spPr>
+        <p:txBody>
+          <a:bodyPr wrap="square">
+            <a:spAutoFit/>
+          </a:bodyPr>
+          <a:lstStyle/>
+          <a:p>
+            <a:pPr algn="r"/>
+            <a:r>
+              <a:rPr sz="1000" b="1" lang="zh-CN">
+                <a:solidFill>
+                  <a:srgbClr val="6B7480"/>
+                </a:solidFill>
+                <a:latin typeface="PingFang SC"/>
+                <a:ea typeface="PingFang SC"/>
+                <a:cs typeface="PingFang SC"/>
+              </a:rPr>
+              <a:t>9</a:t>
+            </a:r>
+          </a:p>
+        </p:txBody>
+      </p:sp>
+      <p:graphicFrame>
+        <p:nvGraphicFramePr>
+          <p:cNvPr id="6" name="Table 5"/>
+          <p:cNvGraphicFramePr>
+            <a:graphicFrameLocks noGrp="1"/>
+          </p:cNvGraphicFramePr>
+          <p:nvPr/>
+        </p:nvGraphicFramePr>
+        <p:xfrm>
+          <a:off x="502920" y="1280160"/>
+          <a:ext cx="11155680" cy="2286000"/>
+        </p:xfrm>
+        <a:graphic>
+          <a:graphicData uri="http://schemas.openxmlformats.org/drawingml/2006/table">
+            <a:tbl>
+              <a:tblPr>
+                <a:tableStyleId>{5C22544A-7EE6-4342-B048-85BDC9FD1C3A}</a:tableStyleId>
+              </a:tblPr>
+              <a:tblGrid>
+                <a:gridCol w="1645920"/>
+                <a:gridCol w="3108960"/>
+                <a:gridCol w="6400800"/>
+              </a:tblGrid>
+              <a:tr h="457200">
+                <a:tc>
+                  <a:txBody>
+                    <a:bodyPr/>
+                    <a:lstStyle/>
+                    <a:p>
+                      <a:pPr algn="ctr"/>
+                      <a:r>
+                        <a:rPr sz="1200" b="1" lang="zh-CN">
+                          <a:solidFill>
+                            <a:srgbClr val="FFFFFF"/>
+                          </a:solidFill>
+                          <a:latin typeface="PingFang SC"/>
+                          <a:ea typeface="PingFang SC"/>
+                          <a:cs typeface="PingFang SC"/>
+                        </a:rPr>
+                        <a:t>通信</a:t>
+                      </a:r>
+                    </a:p>
+                  </a:txBody>
+                  <a:tcPr anchor="ctr" marL="45720" marR="45720" marT="18288" marB="18288">
+                    <a:solidFill>
+                      <a:srgbClr val="222B38"/>
+                    </a:solidFill>
+                  </a:tcPr>
+                </a:tc>
+                <a:tc>
+                  <a:txBody>
+                    <a:bodyPr/>
+                    <a:lstStyle/>
+                    <a:p>
+                      <a:pPr algn="ctr"/>
+                      <a:r>
+                        <a:rPr sz="1200" b="1" lang="zh-CN">
+                          <a:solidFill>
+                            <a:srgbClr val="FFFFFF"/>
+                          </a:solidFill>
+                          <a:latin typeface="PingFang SC"/>
+                          <a:ea typeface="PingFang SC"/>
+                          <a:cs typeface="PingFang SC"/>
+                        </a:rPr>
+                        <a:t>掩盖机制</a:t>
+                      </a:r>
+                    </a:p>
+                  </a:txBody>
+                  <a:tcPr anchor="ctr" marL="45720" marR="45720" marT="18288" marB="18288">
+                    <a:solidFill>
+                      <a:srgbClr val="222B38"/>
+                    </a:solidFill>
+                  </a:tcPr>
+                </a:tc>
+                <a:tc>
+                  <a:txBody>
+                    <a:bodyPr/>
+                    <a:lstStyle/>
+                    <a:p>
+                      <a:pPr algn="ctr"/>
+                      <a:r>
+                        <a:rPr sz="1200" b="1" lang="zh-CN">
+                          <a:solidFill>
+                            <a:srgbClr val="FFFFFF"/>
+                          </a:solidFill>
+                          <a:latin typeface="PingFang SC"/>
+                          <a:ea typeface="PingFang SC"/>
+                          <a:cs typeface="PingFang SC"/>
+                        </a:rPr>
+                        <a:t>判据 / 结论</a:t>
+                      </a:r>
+                    </a:p>
+                  </a:txBody>
+                  <a:tcPr anchor="ctr" marL="45720" marR="45720" marT="18288" marB="18288">
+                    <a:solidFill>
+                      <a:srgbClr val="222B38"/>
+                    </a:solidFill>
+                  </a:tcPr>
+                </a:tc>
+              </a:tr>
+              <a:tr h="457200">
+                <a:tc>
+                  <a:txBody>
+                    <a:bodyPr wrap="square"/>
+                    <a:lstStyle/>
+                    <a:p>
+                      <a:pPr algn="l"/>
+                      <a:r>
+                        <a:rPr sz="1100" b="1" lang="zh-CN">
+                          <a:solidFill>
+                            <a:srgbClr val="222B38"/>
+                          </a:solidFill>
+                          <a:latin typeface="PingFang SC"/>
+                          <a:ea typeface="PingFang SC"/>
+                          <a:cs typeface="PingFang SC"/>
+                        </a:rPr>
+                        <a:t>CP ring</a:t>
+                      </a:r>
+                    </a:p>
+                  </a:txBody>
+                  <a:tcPr anchor="ctr" marL="45720" marR="45720" marT="18288" marB="18288">
+                    <a:solidFill>
+                      <a:srgbClr val="FFFFFF"/>
+                    </a:solidFill>
+                  </a:tcPr>
+                </a:tc>
+                <a:tc>
+                  <a:txBody>
+                    <a:bodyPr wrap="square"/>
+                    <a:lstStyle/>
+                    <a:p>
+                      <a:pPr algn="l"/>
+                      <a:r>
+                        <a:rPr sz="1100" b="0" lang="zh-CN">
+                          <a:solidFill>
+                            <a:srgbClr val="222B38"/>
+                          </a:solidFill>
+                          <a:latin typeface="PingFang SC"/>
+                          <a:ea typeface="PingFang SC"/>
+                          <a:cs typeface="PingFang SC"/>
+                        </a:rPr>
+                        <a:t>逐块流水：传下块 KV ∥ 算当前块</a:t>
+                      </a:r>
+                    </a:p>
+                  </a:txBody>
+                  <a:tcPr anchor="ctr" marL="45720" marR="45720" marT="18288" marB="18288">
+                    <a:solidFill>
+                      <a:srgbClr val="FFFFFF"/>
+                    </a:solidFill>
+                  </a:tcPr>
+                </a:tc>
+                <a:tc>
+                  <a:txBody>
+                    <a:bodyPr wrap="square"/>
+                    <a:lstStyle/>
+                    <a:p>
+                      <a:pPr algn="l"/>
+                      <a:r>
+                        <a:rPr sz="1100" b="0" lang="zh-CN">
+                          <a:solidFill>
+                            <a:srgbClr val="222B38"/>
+                          </a:solidFill>
+                          <a:latin typeface="PingFang SC"/>
+                          <a:ea typeface="PingFang SC"/>
+                          <a:cs typeface="PingFang SC"/>
+                        </a:rPr>
+                        <a:t>S/CP ≥ d_kv·TP·ηF/(2·h_q·B_link) ≈ 674 tok(UB)；块长≥32k → 完全掩盖 ✅</a:t>
+                      </a:r>
+                    </a:p>
+                  </a:txBody>
+                  <a:tcPr anchor="ctr" marL="45720" marR="45720" marT="18288" marB="18288">
+                    <a:solidFill>
+                      <a:srgbClr val="FFFFFF"/>
+                    </a:solidFill>
+                  </a:tcPr>
+                </a:tc>
+              </a:tr>
+              <a:tr h="457200">
+                <a:tc>
+                  <a:txBody>
+                    <a:bodyPr wrap="square"/>
+                    <a:lstStyle/>
+                    <a:p>
+                      <a:pPr algn="l"/>
+                      <a:r>
+                        <a:rPr sz="1100" b="1" lang="zh-CN">
+                          <a:solidFill>
+                            <a:srgbClr val="222B38"/>
+                          </a:solidFill>
+                          <a:latin typeface="PingFang SC"/>
+                          <a:ea typeface="PingFang SC"/>
+                          <a:cs typeface="PingFang SC"/>
+                        </a:rPr>
+                        <a:t>TP AG/RS</a:t>
+                      </a:r>
+                    </a:p>
+                  </a:txBody>
+                  <a:tcPr anchor="ctr" marL="45720" marR="45720" marT="18288" marB="18288">
+                    <a:solidFill>
+                      <a:srgbClr val="F3F5F8"/>
+                    </a:solidFill>
+                  </a:tcPr>
+                </a:tc>
+                <a:tc>
+                  <a:txBody>
+                    <a:bodyPr wrap="square"/>
+                    <a:lstStyle/>
+                    <a:p>
+                      <a:pPr algn="l"/>
+                      <a:r>
+                        <a:rPr sz="1100" b="0" lang="zh-CN">
+                          <a:solidFill>
+                            <a:srgbClr val="222B38"/>
+                          </a:solidFill>
+                          <a:latin typeface="PingFang SC"/>
+                          <a:ea typeface="PingFang SC"/>
+                          <a:cs typeface="PingFang SC"/>
+                        </a:rPr>
+                        <a:t>关键路径，分块部分掩盖</a:t>
+                      </a:r>
+                    </a:p>
+                  </a:txBody>
+                  <a:tcPr anchor="ctr" marL="45720" marR="45720" marT="18288" marB="18288">
+                    <a:solidFill>
+                      <a:srgbClr val="F3F5F8"/>
+                    </a:solidFill>
+                  </a:tcPr>
+                </a:tc>
+                <a:tc>
+                  <a:txBody>
+                    <a:bodyPr wrap="square"/>
+                    <a:lstStyle/>
+                    <a:p>
+                      <a:pPr algn="l"/>
+                      <a:r>
+                        <a:rPr sz="1100" b="0" lang="zh-CN">
+                          <a:solidFill>
+                            <a:srgbClr val="222B38"/>
+                          </a:solidFill>
+                          <a:latin typeface="PingFang SC"/>
+                          <a:ea typeface="PingFang SC"/>
+                          <a:cs typeface="PingFang SC"/>
+                        </a:rPr>
+                        <a:t>t_TP/T_comp ≤2.9%，全暴露也只加 ≤3% ✅</a:t>
+                      </a:r>
+                    </a:p>
+                  </a:txBody>
+                  <a:tcPr anchor="ctr" marL="45720" marR="45720" marT="18288" marB="18288">
+                    <a:solidFill>
+                      <a:srgbClr val="F3F5F8"/>
+                    </a:solidFill>
+                  </a:tcPr>
+                </a:tc>
+              </a:tr>
+              <a:tr h="457200">
+                <a:tc>
+                  <a:txBody>
+                    <a:bodyPr wrap="square"/>
+                    <a:lstStyle/>
+                    <a:p>
+                      <a:pPr algn="l"/>
+                      <a:r>
+                        <a:rPr sz="1100" b="1" lang="zh-CN">
+                          <a:solidFill>
+                            <a:srgbClr val="222B38"/>
+                          </a:solidFill>
+                          <a:latin typeface="PingFang SC"/>
+                          <a:ea typeface="PingFang SC"/>
+                          <a:cs typeface="PingFang SC"/>
+                        </a:rPr>
+                        <a:t>EP a2a</a:t>
+                      </a:r>
+                    </a:p>
+                  </a:txBody>
+                  <a:tcPr anchor="ctr" marL="45720" marR="45720" marT="18288" marB="18288">
+                    <a:solidFill>
+                      <a:srgbClr val="FFFFFF"/>
+                    </a:solidFill>
+                  </a:tcPr>
+                </a:tc>
+                <a:tc>
+                  <a:txBody>
+                    <a:bodyPr wrap="square"/>
+                    <a:lstStyle/>
+                    <a:p>
+                      <a:pPr algn="l"/>
+                      <a:r>
+                        <a:rPr sz="1100" b="0" lang="zh-CN">
+                          <a:solidFill>
+                            <a:srgbClr val="222B38"/>
+                          </a:solidFill>
+                          <a:latin typeface="PingFang SC"/>
+                          <a:ea typeface="PingFang SC"/>
+                          <a:cs typeface="PingFang SC"/>
+                        </a:rPr>
+                        <a:t>与配对块计算交错</a:t>
+                      </a:r>
+                    </a:p>
+                  </a:txBody>
+                  <a:tcPr anchor="ctr" marL="45720" marR="45720" marT="18288" marB="18288">
+                    <a:solidFill>
+                      <a:srgbClr val="FFFFFF"/>
+                    </a:solidFill>
+                  </a:tcPr>
+                </a:tc>
+                <a:tc>
+                  <a:txBody>
+                    <a:bodyPr wrap="square"/>
+                    <a:lstStyle/>
+                    <a:p>
+                      <a:pPr algn="l"/>
+                      <a:r>
+                        <a:rPr sz="1100" b="0" lang="zh-CN">
+                          <a:solidFill>
+                            <a:srgbClr val="222B38"/>
+                          </a:solidFill>
+                          <a:latin typeface="PingFang SC"/>
+                          <a:ea typeface="PingFang SC"/>
+                          <a:cs typeface="PingFang SC"/>
+                        </a:rPr>
+                        <a:t>τ_EP ≤2.3% ✅</a:t>
+                      </a:r>
+                    </a:p>
+                  </a:txBody>
+                  <a:tcPr anchor="ctr" marL="45720" marR="45720" marT="18288" marB="18288">
+                    <a:solidFill>
+                      <a:srgbClr val="FFFFFF"/>
+                    </a:solidFill>
+                  </a:tcPr>
+                </a:tc>
+              </a:tr>
+              <a:tr h="457200">
+                <a:tc>
+                  <a:txBody>
+                    <a:bodyPr wrap="square"/>
+                    <a:lstStyle/>
+                    <a:p>
+                      <a:pPr algn="l"/>
+                      <a:r>
+                        <a:rPr sz="1100" b="1" lang="zh-CN">
+                          <a:solidFill>
+                            <a:srgbClr val="222B38"/>
+                          </a:solidFill>
+                          <a:latin typeface="PingFang SC"/>
+                          <a:ea typeface="PingFang SC"/>
+                          <a:cs typeface="PingFang SC"/>
+                        </a:rPr>
+                        <a:t>ZeRO-2</a:t>
+                      </a:r>
+                    </a:p>
+                  </a:txBody>
+                  <a:tcPr anchor="ctr" marL="45720" marR="45720" marT="18288" marB="18288">
+                    <a:solidFill>
+                      <a:srgbClr val="F3F5F8"/>
+                    </a:solidFill>
+                  </a:tcPr>
+                </a:tc>
+                <a:tc>
+                  <a:txBody>
+                    <a:bodyPr wrap="square"/>
+                    <a:lstStyle/>
+                    <a:p>
+                      <a:pPr algn="l"/>
+                      <a:r>
+                        <a:rPr sz="1100" b="0" lang="zh-CN">
+                          <a:solidFill>
+                            <a:srgbClr val="222B38"/>
+                          </a:solidFill>
+                          <a:latin typeface="PingFang SC"/>
+                          <a:ea typeface="PingFang SC"/>
+                          <a:cs typeface="PingFang SC"/>
+                        </a:rPr>
+                        <a:t>与反向尾部重叠（每步一次）</a:t>
+                      </a:r>
+                    </a:p>
+                  </a:txBody>
+                  <a:tcPr anchor="ctr" marL="45720" marR="45720" marT="18288" marB="18288">
+                    <a:solidFill>
+                      <a:srgbClr val="F3F5F8"/>
+                    </a:solidFill>
+                  </a:tcPr>
+                </a:tc>
+                <a:tc>
+                  <a:txBody>
+                    <a:bodyPr wrap="square"/>
+                    <a:lstStyle/>
+                    <a:p>
+                      <a:pPr algn="l"/>
+                      <a:r>
+                        <a:rPr sz="1100" b="0" lang="zh-CN">
+                          <a:solidFill>
+                            <a:srgbClr val="222B38"/>
+                          </a:solidFill>
+                          <a:latin typeface="PingFang SC"/>
+                          <a:ea typeface="PingFang SC"/>
+                          <a:cs typeface="PingFang SC"/>
+                        </a:rPr>
+                        <a:t>0.11–0.17s ≪ 反向 ✅</a:t>
+                      </a:r>
+                    </a:p>
+                  </a:txBody>
+                  <a:tcPr anchor="ctr" marL="45720" marR="45720" marT="18288" marB="18288">
+                    <a:solidFill>
+                      <a:srgbClr val="F3F5F8"/>
+                    </a:solidFill>
+                  </a:tcPr>
+                </a:tc>
+              </a:tr>
+            </a:tbl>
+          </a:graphicData>
+        </a:graphic>
+      </p:graphicFrame>
+      <p:sp>
+        <p:nvSpPr>
+          <p:cNvPr id="7" name="TextBox 6"/>
+          <p:cNvSpPr txBox="1"/>
+          <p:nvPr/>
+        </p:nvSpPr>
+        <p:spPr>
+          <a:xfrm>
+            <a:off x="502920" y="3429000"/>
+            <a:ext cx="11155680" cy="1188720"/>
+          </a:xfrm>
+          <a:prstGeom prst="rect">
+            <a:avLst/>
+          </a:prstGeom>
+          <a:noFill/>
+        </p:spPr>
+        <p:txBody>
+          <a:bodyPr wrap="square">
+            <a:spAutoFit/>
+          </a:bodyPr>
+          <a:lstStyle/>
+          <a:p>
+            <a:pPr algn="l">
+              <a:spcAft>
+                <a:spcPts val="400"/>
+              </a:spcAft>
+            </a:pPr>
+            <a:r>
+              <a:rPr sz="1200" b="1" lang="zh-CN">
+                <a:solidFill>
+                  <a:srgbClr val="1F5F8B"/>
+                </a:solidFill>
+                <a:latin typeface="PingFang SC"/>
+                <a:ea typeface="PingFang SC"/>
+                <a:cs typeface="PingFang SC"/>
+              </a:rPr>
+              <a:t>T_iter = ⌈B/(DP·b)⌉·(T_pf + n_out·t_dec) + (B/DP)·T_comp·(1+ε)      ε≤τ；t_dec≈33ms/token（六套配置 KV_die·b 均≈50.4GB）</a:t>
             </a:r>
           </a:p>
           <a:p>
@@ -7969,7 +12171,7 @@
                 <a:ea typeface="PingFang SC"/>
                 <a:cs typeface="PingFang SC"/>
               </a:rPr>
-              <a:t>N=die数=256 · TP/CP/PP/DP=张量/上下文/流水/数据并行(die) · EP=CP×DP · SP=TP · S=序列长 · b=每组并发序列</a:t>
+              <a:t>128k·T1(B=16384)：rollout 2.7h + 训练 13.0h ≈ 15.7h（训练计算主导83%）；B=2048 → ~2h。1M·T2(B=1024)：3.0h + 43.9h ≈ 47h ❌</a:t>
             </a:r>
           </a:p>
           <a:p>
@@ -7979,25 +12181,48 @@
               </a:spcAft>
             </a:pPr>
             <a:r>
-              <a:rPr sz="1150" b="0" lang="zh-CN">
+              <a:rPr sz="1050" b="0" lang="zh-CN">
                 <a:solidFill>
-                  <a:srgbClr val="45505E"/>
+                  <a:srgbClr val="6B7480"/>
                 </a:solidFill>
                 <a:latin typeface="PingFang SC"/>
                 <a:ea typeface="PingFang SC"/>
                 <a:cs typeface="PingFang SC"/>
               </a:rPr>
-              <a:t>h=4096 · L=94 · 专家参数~227B / 非专家~8B · 精度 训练 BF16 / 推理权重 FP8</a:t>
-            </a:r>
-          </a:p>
+              <a:t>每波严格界：max(b·T_pf, n_out·t_dec) ≤ 每波 ≤ b·T_pf + n_out·t_dec（T_pf 记一次 = chunked prefill 充分交错的乐观读法）；按上界 128k·T1 rollout 2.7→6.7h、1M·T2 3.0→15.9h，训练主导结论不变</a:t>
+            </a:r>
+          </a:p>
+        </p:txBody>
+      </p:sp>
+      <p:sp>
+        <p:nvSpPr>
+          <p:cNvPr id="8" name="TextBox 7"/>
+          <p:cNvSpPr txBox="1"/>
+          <p:nvPr/>
+        </p:nvSpPr>
+        <p:spPr>
+          <a:xfrm>
+            <a:off x="502920" y="4754880"/>
+            <a:ext cx="11155680" cy="1554480"/>
+          </a:xfrm>
+          <a:prstGeom prst="rect">
+            <a:avLst/>
+          </a:prstGeom>
+          <a:noFill/>
+        </p:spPr>
+        <p:txBody>
+          <a:bodyPr wrap="square">
+            <a:spAutoFit/>
+          </a:bodyPr>
+          <a:lstStyle/>
           <a:p>
             <a:pPr algn="l">
               <a:spcAft>
-                <a:spcPts val="300"/>
+                <a:spcPts val="400"/>
               </a:spcAft>
             </a:pPr>
             <a:r>
-              <a:rPr sz="1300" b="1" lang="zh-CN">
+              <a:rPr sz="1250" b="1" lang="zh-CN">
                 <a:solidFill>
                   <a:srgbClr val="C7000B"/>
                 </a:solidFill>
@@ -8005,7 +12230,7 @@
                 <a:ea typeface="PingFang SC"/>
                 <a:cs typeface="PingFang SC"/>
               </a:rPr>
-              <a:t>核心公式（per-die）</a:t>
+              <a:t>A2 与稀疏注意力敏感性</a:t>
             </a:r>
           </a:p>
           <a:p>
@@ -8015,15 +12240,15 @@
               </a:spcAft>
             </a:pPr>
             <a:r>
-              <a:rPr sz="1150" b="0" lang="zh-CN">
+              <a:rPr sz="1150" b="1" lang="zh-CN">
                 <a:solidFill>
-                  <a:srgbClr val="45505E"/>
+                  <a:srgbClr val="C02828"/>
                 </a:solidFill>
                 <a:latin typeface="PingFang SC"/>
                 <a:ea typeface="PingFang SC"/>
                 <a:cs typeface="PingFang SC"/>
               </a:rPr>
-              <a:t>N = TP×CP×PP×DP = 256      EP = CP×DP      SP = TP</a:t>
+              <a:t>• A2（EP/CP 走 RoCE 25GB/s）：128k T1 的 τ≈20% 超出掩盖窗口 ❌；1M τ≈4.4% 是被「全注意力慢到不可用」撑出的假象</a:t>
             </a:r>
           </a:p>
           <a:p>
@@ -8033,105 +12258,15 @@
               </a:spcAft>
             </a:pPr>
             <a:r>
-              <a:rPr sz="1150" b="0" lang="zh-CN">
+              <a:rPr sz="1150" b="1" lang="zh-CN">
                 <a:solidFill>
-                  <a:srgbClr val="45505E"/>
+                  <a:srgbClr val="222B38"/>
                 </a:solidFill>
                 <a:latin typeface="PingFang SC"/>
                 <a:ea typeface="PingFang SC"/>
                 <a:cs typeface="PingFang SC"/>
               </a:rPr>
-              <a:t>静态(ZeRO-2) = 454/(EP×PP) + 16/(TP×PP) + 13        # 专家wt + 非专家wt + 梯度优化器</a:t>
-            </a:r>
-          </a:p>
-          <a:p>
-            <a:pPr algn="l">
-              <a:spcAft>
-                <a:spcPts val="400"/>
-              </a:spcAft>
-            </a:pPr>
-            <a:r>
-              <a:rPr sz="1150" b="0" lang="zh-CN">
-                <a:solidFill>
-                  <a:srgbClr val="45505E"/>
-                </a:solidFill>
-                <a:latin typeface="PingFang SC"/>
-                <a:ea typeface="PingFang SC"/>
-                <a:cs typeface="PingFang SC"/>
-              </a:rPr>
-              <a:t>训练激活    = 101 × (S/128k) / (TP×CP)</a:t>
-            </a:r>
-          </a:p>
-          <a:p>
-            <a:pPr algn="l">
-              <a:spcAft>
-                <a:spcPts val="400"/>
-              </a:spcAft>
-            </a:pPr>
-            <a:r>
-              <a:rPr sz="1150" b="0" lang="zh-CN">
-                <a:solidFill>
-                  <a:srgbClr val="45505E"/>
-                </a:solidFill>
-                <a:latin typeface="PingFang SC"/>
-                <a:ea typeface="PingFang SC"/>
-                <a:cs typeface="PingFang SC"/>
-              </a:rPr>
-              <a:t>推理 KV/die = 25.2 × (S/128k) × b / (TP×CP)</a:t>
-            </a:r>
-          </a:p>
-          <a:p>
-            <a:pPr algn="l">
-              <a:spcAft>
-                <a:spcPts val="400"/>
-              </a:spcAft>
-            </a:pPr>
-            <a:r>
-              <a:rPr sz="1150" b="0" lang="zh-CN">
-                <a:solidFill>
-                  <a:srgbClr val="45505E"/>
-                </a:solidFill>
-                <a:latin typeface="PingFang SC"/>
-                <a:ea typeface="PingFang SC"/>
-                <a:cs typeface="PingFang SC"/>
-              </a:rPr>
-              <a:t>底座(FP8)   = 227/EP + 8/TP</a:t>
-            </a:r>
-          </a:p>
-          <a:p>
-            <a:pPr algn="l">
-              <a:spcAft>
-                <a:spcPts val="400"/>
-              </a:spcAft>
-            </a:pPr>
-            <a:r>
-              <a:rPr sz="1150" b="1" lang="zh-CN">
-                <a:solidFill>
-                  <a:srgbClr val="1F5F8B"/>
-                </a:solidFill>
-                <a:latin typeface="PingFang SC"/>
-                <a:ea typeface="PingFang SC"/>
-                <a:cs typeface="PingFang SC"/>
-              </a:rPr>
-              <a:t>单die峰值   = max(静态+激活, 底座+KV) ≤ 64 GB</a:t>
-            </a:r>
-          </a:p>
-          <a:p>
-            <a:pPr algn="l">
-              <a:spcAft>
-                <a:spcPts val="400"/>
-              </a:spcAft>
-            </a:pPr>
-            <a:r>
-              <a:rPr sz="1150" b="0" lang="zh-CN">
-                <a:solidFill>
-                  <a:srgbClr val="45505E"/>
-                </a:solidFill>
-                <a:latin typeface="PingFang SC"/>
-                <a:ea typeface="PingFang SC"/>
-                <a:cs typeface="PingFang SC"/>
-              </a:rPr>
-              <a:t>scaling     激活 ∝ S · KV ∝ b·S · 注意力 ∝ S² · CP↑ → 跨节点带宽↑</a:t>
+              <a:t>• 稀疏注意力（加速比 σ）：T_comp÷σ 而 V_TP/V_EP 不变 → τ(σ)=σ·τ(1)。1M/σ=50：A3 0.8%→40%（通信优化重新关键）；A2 →220% 彻底不可行</a:t>
             </a:r>
           </a:p>
         </p:txBody>
